--- a/Business Cards.pptx
+++ b/Business Cards.pptx
@@ -2,7 +2,7 @@
 <file path=ppt/presentation.xml><?xml version="1.0" encoding="utf-8"?>
 <p:presentation xmlns:a="http://schemas.openxmlformats.org/drawingml/2006/main" xmlns:r="http://schemas.openxmlformats.org/officeDocument/2006/relationships" xmlns:p="http://schemas.openxmlformats.org/presentationml/2006/main" saveSubsetFonts="1" autoCompressPictures="0">
   <p:sldMasterIdLst>
-    <p:sldMasterId id="2147483648" r:id="rId1"/>
+    <p:sldMasterId id="2147483651" r:id="rId1"/>
   </p:sldMasterIdLst>
   <p:notesMasterIdLst>
     <p:notesMasterId r:id="rId3"/>
@@ -10,10 +10,13 @@
   <p:sldIdLst>
     <p:sldId id="256" r:id="rId2"/>
   </p:sldIdLst>
-  <p:sldSz cx="3200400" cy="1828800"/>
+  <p:sldSz cx="12239625" cy="7920038"/>
   <p:notesSz cx="1828800" cy="3200400"/>
   <p:defaultTextStyle>
-    <a:lvl1pPr marL="0" algn="l" defTabSz="914400" rtl="0" eaLnBrk="1" latinLnBrk="0" hangingPunct="1">
+    <a:defPPr>
+      <a:defRPr lang="en-US"/>
+    </a:defPPr>
+    <a:lvl1pPr marL="0" algn="l" defTabSz="457200" rtl="0" eaLnBrk="1" latinLnBrk="0" hangingPunct="1">
       <a:defRPr sz="1800" kern="1200">
         <a:solidFill>
           <a:schemeClr val="tx1"/>
@@ -23,7 +26,7 @@
         <a:cs typeface="+mn-cs"/>
       </a:defRPr>
     </a:lvl1pPr>
-    <a:lvl2pPr marL="457200" algn="l" defTabSz="914400" rtl="0" eaLnBrk="1" latinLnBrk="0" hangingPunct="1">
+    <a:lvl2pPr marL="457200" algn="l" defTabSz="457200" rtl="0" eaLnBrk="1" latinLnBrk="0" hangingPunct="1">
       <a:defRPr sz="1800" kern="1200">
         <a:solidFill>
           <a:schemeClr val="tx1"/>
@@ -33,7 +36,7 @@
         <a:cs typeface="+mn-cs"/>
       </a:defRPr>
     </a:lvl2pPr>
-    <a:lvl3pPr marL="914400" algn="l" defTabSz="914400" rtl="0" eaLnBrk="1" latinLnBrk="0" hangingPunct="1">
+    <a:lvl3pPr marL="914400" algn="l" defTabSz="457200" rtl="0" eaLnBrk="1" latinLnBrk="0" hangingPunct="1">
       <a:defRPr sz="1800" kern="1200">
         <a:solidFill>
           <a:schemeClr val="tx1"/>
@@ -43,7 +46,7 @@
         <a:cs typeface="+mn-cs"/>
       </a:defRPr>
     </a:lvl3pPr>
-    <a:lvl4pPr marL="1371600" algn="l" defTabSz="914400" rtl="0" eaLnBrk="1" latinLnBrk="0" hangingPunct="1">
+    <a:lvl4pPr marL="1371600" algn="l" defTabSz="457200" rtl="0" eaLnBrk="1" latinLnBrk="0" hangingPunct="1">
       <a:defRPr sz="1800" kern="1200">
         <a:solidFill>
           <a:schemeClr val="tx1"/>
@@ -53,7 +56,7 @@
         <a:cs typeface="+mn-cs"/>
       </a:defRPr>
     </a:lvl4pPr>
-    <a:lvl5pPr marL="1828800" algn="l" defTabSz="914400" rtl="0" eaLnBrk="1" latinLnBrk="0" hangingPunct="1">
+    <a:lvl5pPr marL="1828800" algn="l" defTabSz="457200" rtl="0" eaLnBrk="1" latinLnBrk="0" hangingPunct="1">
       <a:defRPr sz="1800" kern="1200">
         <a:solidFill>
           <a:schemeClr val="tx1"/>
@@ -63,7 +66,7 @@
         <a:cs typeface="+mn-cs"/>
       </a:defRPr>
     </a:lvl5pPr>
-    <a:lvl6pPr marL="2286000" algn="l" defTabSz="914400" rtl="0" eaLnBrk="1" latinLnBrk="0" hangingPunct="1">
+    <a:lvl6pPr marL="2286000" algn="l" defTabSz="457200" rtl="0" eaLnBrk="1" latinLnBrk="0" hangingPunct="1">
       <a:defRPr sz="1800" kern="1200">
         <a:solidFill>
           <a:schemeClr val="tx1"/>
@@ -73,7 +76,7 @@
         <a:cs typeface="+mn-cs"/>
       </a:defRPr>
     </a:lvl6pPr>
-    <a:lvl7pPr marL="2743200" algn="l" defTabSz="914400" rtl="0" eaLnBrk="1" latinLnBrk="0" hangingPunct="1">
+    <a:lvl7pPr marL="2743200" algn="l" defTabSz="457200" rtl="0" eaLnBrk="1" latinLnBrk="0" hangingPunct="1">
       <a:defRPr sz="1800" kern="1200">
         <a:solidFill>
           <a:schemeClr val="tx1"/>
@@ -83,7 +86,7 @@
         <a:cs typeface="+mn-cs"/>
       </a:defRPr>
     </a:lvl7pPr>
-    <a:lvl8pPr marL="3200400" algn="l" defTabSz="914400" rtl="0" eaLnBrk="1" latinLnBrk="0" hangingPunct="1">
+    <a:lvl8pPr marL="3200400" algn="l" defTabSz="457200" rtl="0" eaLnBrk="1" latinLnBrk="0" hangingPunct="1">
       <a:defRPr sz="1800" kern="1200">
         <a:solidFill>
           <a:schemeClr val="tx1"/>
@@ -93,7 +96,7 @@
         <a:cs typeface="+mn-cs"/>
       </a:defRPr>
     </a:lvl8pPr>
-    <a:lvl9pPr marL="3657600" algn="l" defTabSz="914400" rtl="0" eaLnBrk="1" latinLnBrk="0" hangingPunct="1">
+    <a:lvl9pPr marL="3657600" algn="l" defTabSz="457200" rtl="0" eaLnBrk="1" latinLnBrk="0" hangingPunct="1">
       <a:defRPr sz="1800" kern="1200">
         <a:solidFill>
           <a:schemeClr val="tx1"/>
@@ -104,6 +107,11 @@
       </a:defRPr>
     </a:lvl9pPr>
   </p:defaultTextStyle>
+  <p:extLst>
+    <p:ext uri="{EFAFB233-063F-42B5-8137-9DF3F51BA10A}">
+      <p15:sldGuideLst xmlns:p15="http://schemas.microsoft.com/office/powerpoint/2012/main"/>
+    </p:ext>
+  </p:extLst>
 </p:presentation>
 </file>
 
@@ -207,8 +215,8 @@
         </p:nvSpPr>
         <p:spPr>
           <a:xfrm>
-            <a:off x="685800" y="1143000"/>
-            <a:ext cx="5486400" cy="3086100"/>
+            <a:off x="1044575" y="1143000"/>
+            <a:ext cx="4768850" cy="3086100"/>
           </a:xfrm>
           <a:prstGeom prst="rect">
             <a:avLst/>
@@ -362,8 +370,8 @@
   </p:cSld>
   <p:clrMap bg1="lt1" tx1="dk1" bg2="lt2" tx2="dk2" accent1="accent1" accent2="accent2" accent3="accent3" accent4="accent4" accent5="accent5" accent6="accent6" hlink="hlink" folHlink="folHlink"/>
   <p:notesStyle>
-    <a:lvl1pPr marL="0" algn="l" defTabSz="914400" rtl="0" eaLnBrk="1" latinLnBrk="0" hangingPunct="1">
-      <a:defRPr sz="1200" kern="1200">
+    <a:lvl1pPr marL="0" algn="l" defTabSz="3665372" rtl="0" eaLnBrk="1" latinLnBrk="0" hangingPunct="1">
+      <a:defRPr sz="4810" kern="1200">
         <a:solidFill>
           <a:schemeClr val="tx1"/>
         </a:solidFill>
@@ -372,8 +380,8 @@
         <a:cs typeface="+mn-cs"/>
       </a:defRPr>
     </a:lvl1pPr>
-    <a:lvl2pPr marL="457200" algn="l" defTabSz="914400" rtl="0" eaLnBrk="1" latinLnBrk="0" hangingPunct="1">
-      <a:defRPr sz="1200" kern="1200">
+    <a:lvl2pPr marL="1832686" algn="l" defTabSz="3665372" rtl="0" eaLnBrk="1" latinLnBrk="0" hangingPunct="1">
+      <a:defRPr sz="4810" kern="1200">
         <a:solidFill>
           <a:schemeClr val="tx1"/>
         </a:solidFill>
@@ -382,8 +390,8 @@
         <a:cs typeface="+mn-cs"/>
       </a:defRPr>
     </a:lvl2pPr>
-    <a:lvl3pPr marL="914400" algn="l" defTabSz="914400" rtl="0" eaLnBrk="1" latinLnBrk="0" hangingPunct="1">
-      <a:defRPr sz="1200" kern="1200">
+    <a:lvl3pPr marL="3665372" algn="l" defTabSz="3665372" rtl="0" eaLnBrk="1" latinLnBrk="0" hangingPunct="1">
+      <a:defRPr sz="4810" kern="1200">
         <a:solidFill>
           <a:schemeClr val="tx1"/>
         </a:solidFill>
@@ -392,8 +400,8 @@
         <a:cs typeface="+mn-cs"/>
       </a:defRPr>
     </a:lvl3pPr>
-    <a:lvl4pPr marL="1371600" algn="l" defTabSz="914400" rtl="0" eaLnBrk="1" latinLnBrk="0" hangingPunct="1">
-      <a:defRPr sz="1200" kern="1200">
+    <a:lvl4pPr marL="5498059" algn="l" defTabSz="3665372" rtl="0" eaLnBrk="1" latinLnBrk="0" hangingPunct="1">
+      <a:defRPr sz="4810" kern="1200">
         <a:solidFill>
           <a:schemeClr val="tx1"/>
         </a:solidFill>
@@ -402,8 +410,8 @@
         <a:cs typeface="+mn-cs"/>
       </a:defRPr>
     </a:lvl4pPr>
-    <a:lvl5pPr marL="1828800" algn="l" defTabSz="914400" rtl="0" eaLnBrk="1" latinLnBrk="0" hangingPunct="1">
-      <a:defRPr sz="1200" kern="1200">
+    <a:lvl5pPr marL="7330745" algn="l" defTabSz="3665372" rtl="0" eaLnBrk="1" latinLnBrk="0" hangingPunct="1">
+      <a:defRPr sz="4810" kern="1200">
         <a:solidFill>
           <a:schemeClr val="tx1"/>
         </a:solidFill>
@@ -412,8 +420,8 @@
         <a:cs typeface="+mn-cs"/>
       </a:defRPr>
     </a:lvl5pPr>
-    <a:lvl6pPr marL="2286000" algn="l" defTabSz="914400" rtl="0" eaLnBrk="1" latinLnBrk="0" hangingPunct="1">
-      <a:defRPr sz="1200" kern="1200">
+    <a:lvl6pPr marL="9163431" algn="l" defTabSz="3665372" rtl="0" eaLnBrk="1" latinLnBrk="0" hangingPunct="1">
+      <a:defRPr sz="4810" kern="1200">
         <a:solidFill>
           <a:schemeClr val="tx1"/>
         </a:solidFill>
@@ -422,8 +430,8 @@
         <a:cs typeface="+mn-cs"/>
       </a:defRPr>
     </a:lvl6pPr>
-    <a:lvl7pPr marL="2743200" algn="l" defTabSz="914400" rtl="0" eaLnBrk="1" latinLnBrk="0" hangingPunct="1">
-      <a:defRPr sz="1200" kern="1200">
+    <a:lvl7pPr marL="10996117" algn="l" defTabSz="3665372" rtl="0" eaLnBrk="1" latinLnBrk="0" hangingPunct="1">
+      <a:defRPr sz="4810" kern="1200">
         <a:solidFill>
           <a:schemeClr val="tx1"/>
         </a:solidFill>
@@ -432,8 +440,8 @@
         <a:cs typeface="+mn-cs"/>
       </a:defRPr>
     </a:lvl7pPr>
-    <a:lvl8pPr marL="3200400" algn="l" defTabSz="914400" rtl="0" eaLnBrk="1" latinLnBrk="0" hangingPunct="1">
-      <a:defRPr sz="1200" kern="1200">
+    <a:lvl8pPr marL="12828803" algn="l" defTabSz="3665372" rtl="0" eaLnBrk="1" latinLnBrk="0" hangingPunct="1">
+      <a:defRPr sz="4810" kern="1200">
         <a:solidFill>
           <a:schemeClr val="tx1"/>
         </a:solidFill>
@@ -442,8 +450,8 @@
         <a:cs typeface="+mn-cs"/>
       </a:defRPr>
     </a:lvl8pPr>
-    <a:lvl9pPr marL="3657600" algn="l" defTabSz="914400" rtl="0" eaLnBrk="1" latinLnBrk="0" hangingPunct="1">
-      <a:defRPr sz="1200" kern="1200">
+    <a:lvl9pPr marL="14661490" algn="l" defTabSz="3665372" rtl="0" eaLnBrk="1" latinLnBrk="0" hangingPunct="1">
+      <a:defRPr sz="4810" kern="1200">
         <a:solidFill>
           <a:schemeClr val="tx1"/>
         </a:solidFill>
@@ -485,8 +493,8 @@
         </p:nvSpPr>
         <p:spPr>
           <a:xfrm>
-            <a:off x="728663" y="1143000"/>
-            <a:ext cx="5400675" cy="3086100"/>
+            <a:off x="1044575" y="1143000"/>
+            <a:ext cx="4768850" cy="3086100"/>
           </a:xfrm>
         </p:spPr>
       </p:sp>
@@ -546,13 +554,8 @@
 </file>
 
 <file path=ppt/slideLayouts/slideLayout1.xml><?xml version="1.0" encoding="utf-8"?>
-<p:sldLayout xmlns:a="http://schemas.openxmlformats.org/drawingml/2006/main" xmlns:r="http://schemas.openxmlformats.org/officeDocument/2006/relationships" xmlns:p="http://schemas.openxmlformats.org/presentationml/2006/main" preserve="1">
-  <p:cSld name="DEFAULT">
-    <p:bg>
-      <p:bgRef idx="1001">
-        <a:schemeClr val="bg1"/>
-      </p:bgRef>
-    </p:bg>
+<p:sldLayout xmlns:a="http://schemas.openxmlformats.org/drawingml/2006/main" xmlns:r="http://schemas.openxmlformats.org/officeDocument/2006/relationships" xmlns:p="http://schemas.openxmlformats.org/presentationml/2006/main" type="title" preserve="1">
+  <p:cSld name="Title Slide">
     <p:spTree>
       <p:nvGrpSpPr>
         <p:cNvPr id="1" name=""/>
@@ -567,16 +570,536 @@
           <a:chExt cx="0" cy="0"/>
         </a:xfrm>
       </p:grpSpPr>
+      <p:sp>
+        <p:nvSpPr>
+          <p:cNvPr id="2" name="Title 1"/>
+          <p:cNvSpPr>
+            <a:spLocks noGrp="1"/>
+          </p:cNvSpPr>
+          <p:nvPr>
+            <p:ph type="ctrTitle"/>
+          </p:nvPr>
+        </p:nvSpPr>
+        <p:spPr>
+          <a:xfrm>
+            <a:off x="917972" y="1296173"/>
+            <a:ext cx="10403681" cy="2757347"/>
+          </a:xfrm>
+        </p:spPr>
+        <p:txBody>
+          <a:bodyPr anchor="b"/>
+          <a:lstStyle>
+            <a:lvl1pPr algn="ctr">
+              <a:defRPr sz="6929"/>
+            </a:lvl1pPr>
+          </a:lstStyle>
+          <a:p>
+            <a:r>
+              <a:rPr lang="en-US"/>
+              <a:t>Click to edit Master title style</a:t>
+            </a:r>
+            <a:endParaRPr lang="en-US" dirty="0"/>
+          </a:p>
+        </p:txBody>
+      </p:sp>
+      <p:sp>
+        <p:nvSpPr>
+          <p:cNvPr id="3" name="Subtitle 2"/>
+          <p:cNvSpPr>
+            <a:spLocks noGrp="1"/>
+          </p:cNvSpPr>
+          <p:nvPr>
+            <p:ph type="subTitle" idx="1"/>
+          </p:nvPr>
+        </p:nvSpPr>
+        <p:spPr>
+          <a:xfrm>
+            <a:off x="1529953" y="4159854"/>
+            <a:ext cx="9179719" cy="1912175"/>
+          </a:xfrm>
+        </p:spPr>
+        <p:txBody>
+          <a:bodyPr/>
+          <a:lstStyle>
+            <a:lvl1pPr marL="0" indent="0" algn="ctr">
+              <a:buNone/>
+              <a:defRPr sz="2772"/>
+            </a:lvl1pPr>
+            <a:lvl2pPr marL="528020" indent="0" algn="ctr">
+              <a:buNone/>
+              <a:defRPr sz="2310"/>
+            </a:lvl2pPr>
+            <a:lvl3pPr marL="1056041" indent="0" algn="ctr">
+              <a:buNone/>
+              <a:defRPr sz="2079"/>
+            </a:lvl3pPr>
+            <a:lvl4pPr marL="1584061" indent="0" algn="ctr">
+              <a:buNone/>
+              <a:defRPr sz="1848"/>
+            </a:lvl4pPr>
+            <a:lvl5pPr marL="2112081" indent="0" algn="ctr">
+              <a:buNone/>
+              <a:defRPr sz="1848"/>
+            </a:lvl5pPr>
+            <a:lvl6pPr marL="2640101" indent="0" algn="ctr">
+              <a:buNone/>
+              <a:defRPr sz="1848"/>
+            </a:lvl6pPr>
+            <a:lvl7pPr marL="3168122" indent="0" algn="ctr">
+              <a:buNone/>
+              <a:defRPr sz="1848"/>
+            </a:lvl7pPr>
+            <a:lvl8pPr marL="3696142" indent="0" algn="ctr">
+              <a:buNone/>
+              <a:defRPr sz="1848"/>
+            </a:lvl8pPr>
+            <a:lvl9pPr marL="4224162" indent="0" algn="ctr">
+              <a:buNone/>
+              <a:defRPr sz="1848"/>
+            </a:lvl9pPr>
+          </a:lstStyle>
+          <a:p>
+            <a:r>
+              <a:rPr lang="en-US"/>
+              <a:t>Click to edit Master subtitle style</a:t>
+            </a:r>
+            <a:endParaRPr lang="en-US" dirty="0"/>
+          </a:p>
+        </p:txBody>
+      </p:sp>
+      <p:sp>
+        <p:nvSpPr>
+          <p:cNvPr id="4" name="Date Placeholder 3"/>
+          <p:cNvSpPr>
+            <a:spLocks noGrp="1"/>
+          </p:cNvSpPr>
+          <p:nvPr>
+            <p:ph type="dt" sz="half" idx="10"/>
+          </p:nvPr>
+        </p:nvSpPr>
+        <p:spPr/>
+        <p:txBody>
+          <a:bodyPr/>
+          <a:lstStyle/>
+          <a:p>
+            <a:fld id="{C764DE79-268F-4C1A-8933-263129D2AF90}" type="datetimeFigureOut">
+              <a:rPr lang="en-US" dirty="0"/>
+              <a:t>7/13/2026</a:t>
+            </a:fld>
+            <a:endParaRPr lang="en-US" dirty="0"/>
+          </a:p>
+        </p:txBody>
+      </p:sp>
+      <p:sp>
+        <p:nvSpPr>
+          <p:cNvPr id="5" name="Footer Placeholder 4"/>
+          <p:cNvSpPr>
+            <a:spLocks noGrp="1"/>
+          </p:cNvSpPr>
+          <p:nvPr>
+            <p:ph type="ftr" sz="quarter" idx="11"/>
+          </p:nvPr>
+        </p:nvSpPr>
+        <p:spPr/>
+        <p:txBody>
+          <a:bodyPr/>
+          <a:lstStyle/>
+          <a:p>
+            <a:endParaRPr lang="en-US" dirty="0"/>
+          </a:p>
+        </p:txBody>
+      </p:sp>
+      <p:sp>
+        <p:nvSpPr>
+          <p:cNvPr id="6" name="Slide Number Placeholder 5"/>
+          <p:cNvSpPr>
+            <a:spLocks noGrp="1"/>
+          </p:cNvSpPr>
+          <p:nvPr>
+            <p:ph type="sldNum" sz="quarter" idx="12"/>
+          </p:nvPr>
+        </p:nvSpPr>
+        <p:spPr/>
+        <p:txBody>
+          <a:bodyPr/>
+          <a:lstStyle/>
+          <a:p>
+            <a:fld id="{48F63A3B-78C7-47BE-AE5E-E10140E04643}" type="slidenum">
+              <a:rPr lang="en-US" dirty="0"/>
+              <a:t>‹#›</a:t>
+            </a:fld>
+            <a:endParaRPr lang="en-US" dirty="0"/>
+          </a:p>
+        </p:txBody>
+      </p:sp>
     </p:spTree>
+    <p:extLst>
+      <p:ext uri="{BB962C8B-B14F-4D97-AF65-F5344CB8AC3E}">
+        <p14:creationId xmlns:p14="http://schemas.microsoft.com/office/powerpoint/2010/main" val="2240603014"/>
+      </p:ext>
+    </p:extLst>
   </p:cSld>
   <p:clrMapOvr>
     <a:masterClrMapping/>
   </p:clrMapOvr>
+  <p:hf sldNum="0" hdr="0" ftr="0" dt="0"/>
 </p:sldLayout>
 </file>
 
-<file path=ppt/slideLayouts/slideLayout2.xml><?xml version="1.0" encoding="utf-8"?>
-<p:sldLayout xmlns:a="http://schemas.openxmlformats.org/drawingml/2006/main" xmlns:r="http://schemas.openxmlformats.org/officeDocument/2006/relationships" xmlns:p="http://schemas.openxmlformats.org/presentationml/2006/main" preserve="1">
+<file path=ppt/slideLayouts/slideLayout10.xml><?xml version="1.0" encoding="utf-8"?>
+<p:sldLayout xmlns:a="http://schemas.openxmlformats.org/drawingml/2006/main" xmlns:r="http://schemas.openxmlformats.org/officeDocument/2006/relationships" xmlns:p="http://schemas.openxmlformats.org/presentationml/2006/main" type="vertTx" preserve="1">
+  <p:cSld name="Title and Vertical Text">
+    <p:spTree>
+      <p:nvGrpSpPr>
+        <p:cNvPr id="1" name=""/>
+        <p:cNvGrpSpPr/>
+        <p:nvPr/>
+      </p:nvGrpSpPr>
+      <p:grpSpPr>
+        <a:xfrm>
+          <a:off x="0" y="0"/>
+          <a:ext cx="0" cy="0"/>
+          <a:chOff x="0" y="0"/>
+          <a:chExt cx="0" cy="0"/>
+        </a:xfrm>
+      </p:grpSpPr>
+      <p:sp>
+        <p:nvSpPr>
+          <p:cNvPr id="2" name="Title 1"/>
+          <p:cNvSpPr>
+            <a:spLocks noGrp="1"/>
+          </p:cNvSpPr>
+          <p:nvPr>
+            <p:ph type="title"/>
+          </p:nvPr>
+        </p:nvSpPr>
+        <p:spPr/>
+        <p:txBody>
+          <a:bodyPr/>
+          <a:lstStyle/>
+          <a:p>
+            <a:r>
+              <a:rPr lang="en-US"/>
+              <a:t>Click to edit Master title style</a:t>
+            </a:r>
+            <a:endParaRPr lang="en-US" dirty="0"/>
+          </a:p>
+        </p:txBody>
+      </p:sp>
+      <p:sp>
+        <p:nvSpPr>
+          <p:cNvPr id="3" name="Vertical Text Placeholder 2"/>
+          <p:cNvSpPr>
+            <a:spLocks noGrp="1"/>
+          </p:cNvSpPr>
+          <p:nvPr>
+            <p:ph type="body" orient="vert" idx="1"/>
+          </p:nvPr>
+        </p:nvSpPr>
+        <p:spPr/>
+        <p:txBody>
+          <a:bodyPr vert="eaVert"/>
+          <a:lstStyle/>
+          <a:p>
+            <a:pPr lvl="0"/>
+            <a:r>
+              <a:rPr lang="en-US"/>
+              <a:t>Click to edit Master text styles</a:t>
+            </a:r>
+          </a:p>
+          <a:p>
+            <a:pPr lvl="1"/>
+            <a:r>
+              <a:rPr lang="en-US"/>
+              <a:t>Second level</a:t>
+            </a:r>
+          </a:p>
+          <a:p>
+            <a:pPr lvl="2"/>
+            <a:r>
+              <a:rPr lang="en-US"/>
+              <a:t>Third level</a:t>
+            </a:r>
+          </a:p>
+          <a:p>
+            <a:pPr lvl="3"/>
+            <a:r>
+              <a:rPr lang="en-US"/>
+              <a:t>Fourth level</a:t>
+            </a:r>
+          </a:p>
+          <a:p>
+            <a:pPr lvl="4"/>
+            <a:r>
+              <a:rPr lang="en-US"/>
+              <a:t>Fifth level</a:t>
+            </a:r>
+            <a:endParaRPr lang="en-US" dirty="0"/>
+          </a:p>
+        </p:txBody>
+      </p:sp>
+      <p:sp>
+        <p:nvSpPr>
+          <p:cNvPr id="4" name="Date Placeholder 3"/>
+          <p:cNvSpPr>
+            <a:spLocks noGrp="1"/>
+          </p:cNvSpPr>
+          <p:nvPr>
+            <p:ph type="dt" sz="half" idx="10"/>
+          </p:nvPr>
+        </p:nvSpPr>
+        <p:spPr/>
+        <p:txBody>
+          <a:bodyPr/>
+          <a:lstStyle/>
+          <a:p>
+            <a:fld id="{C764DE79-268F-4C1A-8933-263129D2AF90}" type="datetimeFigureOut">
+              <a:rPr lang="en-US" dirty="0"/>
+              <a:t>7/13/2026</a:t>
+            </a:fld>
+            <a:endParaRPr lang="en-US" dirty="0"/>
+          </a:p>
+        </p:txBody>
+      </p:sp>
+      <p:sp>
+        <p:nvSpPr>
+          <p:cNvPr id="5" name="Footer Placeholder 4"/>
+          <p:cNvSpPr>
+            <a:spLocks noGrp="1"/>
+          </p:cNvSpPr>
+          <p:nvPr>
+            <p:ph type="ftr" sz="quarter" idx="11"/>
+          </p:nvPr>
+        </p:nvSpPr>
+        <p:spPr/>
+        <p:txBody>
+          <a:bodyPr/>
+          <a:lstStyle/>
+          <a:p>
+            <a:endParaRPr lang="en-US" dirty="0"/>
+          </a:p>
+        </p:txBody>
+      </p:sp>
+      <p:sp>
+        <p:nvSpPr>
+          <p:cNvPr id="6" name="Slide Number Placeholder 5"/>
+          <p:cNvSpPr>
+            <a:spLocks noGrp="1"/>
+          </p:cNvSpPr>
+          <p:nvPr>
+            <p:ph type="sldNum" sz="quarter" idx="12"/>
+          </p:nvPr>
+        </p:nvSpPr>
+        <p:spPr/>
+        <p:txBody>
+          <a:bodyPr/>
+          <a:lstStyle/>
+          <a:p>
+            <a:fld id="{48F63A3B-78C7-47BE-AE5E-E10140E04643}" type="slidenum">
+              <a:rPr lang="en-US" dirty="0"/>
+              <a:t>‹#›</a:t>
+            </a:fld>
+            <a:endParaRPr lang="en-US" dirty="0"/>
+          </a:p>
+        </p:txBody>
+      </p:sp>
+    </p:spTree>
+    <p:extLst>
+      <p:ext uri="{BB962C8B-B14F-4D97-AF65-F5344CB8AC3E}">
+        <p14:creationId xmlns:p14="http://schemas.microsoft.com/office/powerpoint/2010/main" val="3751432061"/>
+      </p:ext>
+    </p:extLst>
+  </p:cSld>
+  <p:clrMapOvr>
+    <a:masterClrMapping/>
+  </p:clrMapOvr>
+  <p:hf sldNum="0" hdr="0" ftr="0" dt="0"/>
+</p:sldLayout>
+</file>
+
+<file path=ppt/slideLayouts/slideLayout11.xml><?xml version="1.0" encoding="utf-8"?>
+<p:sldLayout xmlns:a="http://schemas.openxmlformats.org/drawingml/2006/main" xmlns:r="http://schemas.openxmlformats.org/officeDocument/2006/relationships" xmlns:p="http://schemas.openxmlformats.org/presentationml/2006/main" type="vertTitleAndTx" preserve="1">
+  <p:cSld name="Vertical Title and Text">
+    <p:spTree>
+      <p:nvGrpSpPr>
+        <p:cNvPr id="1" name=""/>
+        <p:cNvGrpSpPr/>
+        <p:nvPr/>
+      </p:nvGrpSpPr>
+      <p:grpSpPr>
+        <a:xfrm>
+          <a:off x="0" y="0"/>
+          <a:ext cx="0" cy="0"/>
+          <a:chOff x="0" y="0"/>
+          <a:chExt cx="0" cy="0"/>
+        </a:xfrm>
+      </p:grpSpPr>
+      <p:sp>
+        <p:nvSpPr>
+          <p:cNvPr id="2" name="Vertical Title 1"/>
+          <p:cNvSpPr>
+            <a:spLocks noGrp="1"/>
+          </p:cNvSpPr>
+          <p:nvPr>
+            <p:ph type="title" orient="vert"/>
+          </p:nvPr>
+        </p:nvSpPr>
+        <p:spPr>
+          <a:xfrm>
+            <a:off x="8758982" y="421669"/>
+            <a:ext cx="2639169" cy="6711866"/>
+          </a:xfrm>
+        </p:spPr>
+        <p:txBody>
+          <a:bodyPr vert="eaVert"/>
+          <a:lstStyle/>
+          <a:p>
+            <a:r>
+              <a:rPr lang="en-US"/>
+              <a:t>Click to edit Master title style</a:t>
+            </a:r>
+            <a:endParaRPr lang="en-US" dirty="0"/>
+          </a:p>
+        </p:txBody>
+      </p:sp>
+      <p:sp>
+        <p:nvSpPr>
+          <p:cNvPr id="3" name="Vertical Text Placeholder 2"/>
+          <p:cNvSpPr>
+            <a:spLocks noGrp="1"/>
+          </p:cNvSpPr>
+          <p:nvPr>
+            <p:ph type="body" orient="vert" idx="1"/>
+          </p:nvPr>
+        </p:nvSpPr>
+        <p:spPr>
+          <a:xfrm>
+            <a:off x="841475" y="421669"/>
+            <a:ext cx="7764512" cy="6711866"/>
+          </a:xfrm>
+        </p:spPr>
+        <p:txBody>
+          <a:bodyPr vert="eaVert"/>
+          <a:lstStyle/>
+          <a:p>
+            <a:pPr lvl="0"/>
+            <a:r>
+              <a:rPr lang="en-US"/>
+              <a:t>Click to edit Master text styles</a:t>
+            </a:r>
+          </a:p>
+          <a:p>
+            <a:pPr lvl="1"/>
+            <a:r>
+              <a:rPr lang="en-US"/>
+              <a:t>Second level</a:t>
+            </a:r>
+          </a:p>
+          <a:p>
+            <a:pPr lvl="2"/>
+            <a:r>
+              <a:rPr lang="en-US"/>
+              <a:t>Third level</a:t>
+            </a:r>
+          </a:p>
+          <a:p>
+            <a:pPr lvl="3"/>
+            <a:r>
+              <a:rPr lang="en-US"/>
+              <a:t>Fourth level</a:t>
+            </a:r>
+          </a:p>
+          <a:p>
+            <a:pPr lvl="4"/>
+            <a:r>
+              <a:rPr lang="en-US"/>
+              <a:t>Fifth level</a:t>
+            </a:r>
+            <a:endParaRPr lang="en-US" dirty="0"/>
+          </a:p>
+        </p:txBody>
+      </p:sp>
+      <p:sp>
+        <p:nvSpPr>
+          <p:cNvPr id="4" name="Date Placeholder 3"/>
+          <p:cNvSpPr>
+            <a:spLocks noGrp="1"/>
+          </p:cNvSpPr>
+          <p:nvPr>
+            <p:ph type="dt" sz="half" idx="10"/>
+          </p:nvPr>
+        </p:nvSpPr>
+        <p:spPr/>
+        <p:txBody>
+          <a:bodyPr/>
+          <a:lstStyle/>
+          <a:p>
+            <a:fld id="{C764DE79-268F-4C1A-8933-263129D2AF90}" type="datetimeFigureOut">
+              <a:rPr lang="en-US" dirty="0"/>
+              <a:t>7/13/2026</a:t>
+            </a:fld>
+            <a:endParaRPr lang="en-US" dirty="0"/>
+          </a:p>
+        </p:txBody>
+      </p:sp>
+      <p:sp>
+        <p:nvSpPr>
+          <p:cNvPr id="5" name="Footer Placeholder 4"/>
+          <p:cNvSpPr>
+            <a:spLocks noGrp="1"/>
+          </p:cNvSpPr>
+          <p:nvPr>
+            <p:ph type="ftr" sz="quarter" idx="11"/>
+          </p:nvPr>
+        </p:nvSpPr>
+        <p:spPr/>
+        <p:txBody>
+          <a:bodyPr/>
+          <a:lstStyle/>
+          <a:p>
+            <a:endParaRPr lang="en-US" dirty="0"/>
+          </a:p>
+        </p:txBody>
+      </p:sp>
+      <p:sp>
+        <p:nvSpPr>
+          <p:cNvPr id="6" name="Slide Number Placeholder 5"/>
+          <p:cNvSpPr>
+            <a:spLocks noGrp="1"/>
+          </p:cNvSpPr>
+          <p:nvPr>
+            <p:ph type="sldNum" sz="quarter" idx="12"/>
+          </p:nvPr>
+        </p:nvSpPr>
+        <p:spPr/>
+        <p:txBody>
+          <a:bodyPr/>
+          <a:lstStyle/>
+          <a:p>
+            <a:fld id="{48F63A3B-78C7-47BE-AE5E-E10140E04643}" type="slidenum">
+              <a:rPr lang="en-US" dirty="0"/>
+              <a:t>‹#›</a:t>
+            </a:fld>
+            <a:endParaRPr lang="en-US" dirty="0"/>
+          </a:p>
+        </p:txBody>
+      </p:sp>
+    </p:spTree>
+    <p:extLst>
+      <p:ext uri="{BB962C8B-B14F-4D97-AF65-F5344CB8AC3E}">
+        <p14:creationId xmlns:p14="http://schemas.microsoft.com/office/powerpoint/2010/main" val="1445719219"/>
+      </p:ext>
+    </p:extLst>
+  </p:cSld>
+  <p:clrMapOvr>
+    <a:masterClrMapping/>
+  </p:clrMapOvr>
+  <p:hf sldNum="0" hdr="0" ftr="0" dt="0"/>
+</p:sldLayout>
+</file>
+
+<file path=ppt/slideLayouts/slideLayout12.xml><?xml version="1.0" encoding="utf-8"?>
+<p:sldLayout xmlns:a="http://schemas.openxmlformats.org/drawingml/2006/main" xmlns:r="http://schemas.openxmlformats.org/officeDocument/2006/relationships" xmlns:p="http://schemas.openxmlformats.org/presentationml/2006/main">
   <p:cSld name="CARD_MASTER">
     <p:bg>
       <p:bgPr>
@@ -612,8 +1135,8 @@
         </p:nvSpPr>
         <p:spPr>
           <a:xfrm>
-            <a:off x="1636776" y="384048"/>
-            <a:ext cx="1435608" cy="457200"/>
+            <a:off x="6259694" y="1663208"/>
+            <a:ext cx="5490346" cy="1980010"/>
           </a:xfrm>
           <a:prstGeom prst="rect">
             <a:avLst/>
@@ -638,10 +1161,1783 @@
         </p:txBody>
       </p:sp>
     </p:spTree>
+    <p:extLst>
+      <p:ext uri="{BB962C8B-B14F-4D97-AF65-F5344CB8AC3E}">
+        <p14:creationId xmlns:p14="http://schemas.microsoft.com/office/powerpoint/2010/main" val="2539660360"/>
+      </p:ext>
+    </p:extLst>
   </p:cSld>
   <p:clrMapOvr>
     <a:masterClrMapping/>
   </p:clrMapOvr>
+</p:sldLayout>
+</file>
+
+<file path=ppt/slideLayouts/slideLayout2.xml><?xml version="1.0" encoding="utf-8"?>
+<p:sldLayout xmlns:a="http://schemas.openxmlformats.org/drawingml/2006/main" xmlns:r="http://schemas.openxmlformats.org/officeDocument/2006/relationships" xmlns:p="http://schemas.openxmlformats.org/presentationml/2006/main" type="obj" preserve="1">
+  <p:cSld name="Title and Content">
+    <p:spTree>
+      <p:nvGrpSpPr>
+        <p:cNvPr id="1" name=""/>
+        <p:cNvGrpSpPr/>
+        <p:nvPr/>
+      </p:nvGrpSpPr>
+      <p:grpSpPr>
+        <a:xfrm>
+          <a:off x="0" y="0"/>
+          <a:ext cx="0" cy="0"/>
+          <a:chOff x="0" y="0"/>
+          <a:chExt cx="0" cy="0"/>
+        </a:xfrm>
+      </p:grpSpPr>
+      <p:sp>
+        <p:nvSpPr>
+          <p:cNvPr id="2" name="Title 1"/>
+          <p:cNvSpPr>
+            <a:spLocks noGrp="1"/>
+          </p:cNvSpPr>
+          <p:nvPr>
+            <p:ph type="title"/>
+          </p:nvPr>
+        </p:nvSpPr>
+        <p:spPr/>
+        <p:txBody>
+          <a:bodyPr/>
+          <a:lstStyle/>
+          <a:p>
+            <a:r>
+              <a:rPr lang="en-US"/>
+              <a:t>Click to edit Master title style</a:t>
+            </a:r>
+            <a:endParaRPr lang="en-US" dirty="0"/>
+          </a:p>
+        </p:txBody>
+      </p:sp>
+      <p:sp>
+        <p:nvSpPr>
+          <p:cNvPr id="3" name="Content Placeholder 2"/>
+          <p:cNvSpPr>
+            <a:spLocks noGrp="1"/>
+          </p:cNvSpPr>
+          <p:nvPr>
+            <p:ph idx="1"/>
+          </p:nvPr>
+        </p:nvSpPr>
+        <p:spPr/>
+        <p:txBody>
+          <a:bodyPr/>
+          <a:lstStyle/>
+          <a:p>
+            <a:pPr lvl="0"/>
+            <a:r>
+              <a:rPr lang="en-US"/>
+              <a:t>Click to edit Master text styles</a:t>
+            </a:r>
+          </a:p>
+          <a:p>
+            <a:pPr lvl="1"/>
+            <a:r>
+              <a:rPr lang="en-US"/>
+              <a:t>Second level</a:t>
+            </a:r>
+          </a:p>
+          <a:p>
+            <a:pPr lvl="2"/>
+            <a:r>
+              <a:rPr lang="en-US"/>
+              <a:t>Third level</a:t>
+            </a:r>
+          </a:p>
+          <a:p>
+            <a:pPr lvl="3"/>
+            <a:r>
+              <a:rPr lang="en-US"/>
+              <a:t>Fourth level</a:t>
+            </a:r>
+          </a:p>
+          <a:p>
+            <a:pPr lvl="4"/>
+            <a:r>
+              <a:rPr lang="en-US"/>
+              <a:t>Fifth level</a:t>
+            </a:r>
+            <a:endParaRPr lang="en-US" dirty="0"/>
+          </a:p>
+        </p:txBody>
+      </p:sp>
+      <p:sp>
+        <p:nvSpPr>
+          <p:cNvPr id="4" name="Date Placeholder 3"/>
+          <p:cNvSpPr>
+            <a:spLocks noGrp="1"/>
+          </p:cNvSpPr>
+          <p:nvPr>
+            <p:ph type="dt" sz="half" idx="10"/>
+          </p:nvPr>
+        </p:nvSpPr>
+        <p:spPr/>
+        <p:txBody>
+          <a:bodyPr/>
+          <a:lstStyle/>
+          <a:p>
+            <a:fld id="{C764DE79-268F-4C1A-8933-263129D2AF90}" type="datetimeFigureOut">
+              <a:rPr lang="en-US" dirty="0"/>
+              <a:t>7/13/2026</a:t>
+            </a:fld>
+            <a:endParaRPr lang="en-US" dirty="0"/>
+          </a:p>
+        </p:txBody>
+      </p:sp>
+      <p:sp>
+        <p:nvSpPr>
+          <p:cNvPr id="5" name="Footer Placeholder 4"/>
+          <p:cNvSpPr>
+            <a:spLocks noGrp="1"/>
+          </p:cNvSpPr>
+          <p:nvPr>
+            <p:ph type="ftr" sz="quarter" idx="11"/>
+          </p:nvPr>
+        </p:nvSpPr>
+        <p:spPr/>
+        <p:txBody>
+          <a:bodyPr/>
+          <a:lstStyle/>
+          <a:p>
+            <a:endParaRPr lang="en-US" dirty="0"/>
+          </a:p>
+        </p:txBody>
+      </p:sp>
+      <p:sp>
+        <p:nvSpPr>
+          <p:cNvPr id="6" name="Slide Number Placeholder 5"/>
+          <p:cNvSpPr>
+            <a:spLocks noGrp="1"/>
+          </p:cNvSpPr>
+          <p:nvPr>
+            <p:ph type="sldNum" sz="quarter" idx="12"/>
+          </p:nvPr>
+        </p:nvSpPr>
+        <p:spPr/>
+        <p:txBody>
+          <a:bodyPr/>
+          <a:lstStyle/>
+          <a:p>
+            <a:fld id="{48F63A3B-78C7-47BE-AE5E-E10140E04643}" type="slidenum">
+              <a:rPr lang="en-US" dirty="0"/>
+              <a:t>‹#›</a:t>
+            </a:fld>
+            <a:endParaRPr lang="en-US" dirty="0"/>
+          </a:p>
+        </p:txBody>
+      </p:sp>
+    </p:spTree>
+    <p:extLst>
+      <p:ext uri="{BB962C8B-B14F-4D97-AF65-F5344CB8AC3E}">
+        <p14:creationId xmlns:p14="http://schemas.microsoft.com/office/powerpoint/2010/main" val="3724072807"/>
+      </p:ext>
+    </p:extLst>
+  </p:cSld>
+  <p:clrMapOvr>
+    <a:masterClrMapping/>
+  </p:clrMapOvr>
+  <p:hf sldNum="0" hdr="0" ftr="0" dt="0"/>
+</p:sldLayout>
+</file>
+
+<file path=ppt/slideLayouts/slideLayout3.xml><?xml version="1.0" encoding="utf-8"?>
+<p:sldLayout xmlns:a="http://schemas.openxmlformats.org/drawingml/2006/main" xmlns:r="http://schemas.openxmlformats.org/officeDocument/2006/relationships" xmlns:p="http://schemas.openxmlformats.org/presentationml/2006/main" type="secHead" preserve="1">
+  <p:cSld name="Section Header">
+    <p:spTree>
+      <p:nvGrpSpPr>
+        <p:cNvPr id="1" name=""/>
+        <p:cNvGrpSpPr/>
+        <p:nvPr/>
+      </p:nvGrpSpPr>
+      <p:grpSpPr>
+        <a:xfrm>
+          <a:off x="0" y="0"/>
+          <a:ext cx="0" cy="0"/>
+          <a:chOff x="0" y="0"/>
+          <a:chExt cx="0" cy="0"/>
+        </a:xfrm>
+      </p:grpSpPr>
+      <p:sp>
+        <p:nvSpPr>
+          <p:cNvPr id="2" name="Title 1"/>
+          <p:cNvSpPr>
+            <a:spLocks noGrp="1"/>
+          </p:cNvSpPr>
+          <p:nvPr>
+            <p:ph type="title"/>
+          </p:nvPr>
+        </p:nvSpPr>
+        <p:spPr>
+          <a:xfrm>
+            <a:off x="835100" y="1974512"/>
+            <a:ext cx="10556677" cy="3294515"/>
+          </a:xfrm>
+        </p:spPr>
+        <p:txBody>
+          <a:bodyPr anchor="b"/>
+          <a:lstStyle>
+            <a:lvl1pPr>
+              <a:defRPr sz="6929"/>
+            </a:lvl1pPr>
+          </a:lstStyle>
+          <a:p>
+            <a:r>
+              <a:rPr lang="en-US"/>
+              <a:t>Click to edit Master title style</a:t>
+            </a:r>
+            <a:endParaRPr lang="en-US" dirty="0"/>
+          </a:p>
+        </p:txBody>
+      </p:sp>
+      <p:sp>
+        <p:nvSpPr>
+          <p:cNvPr id="3" name="Text Placeholder 2"/>
+          <p:cNvSpPr>
+            <a:spLocks noGrp="1"/>
+          </p:cNvSpPr>
+          <p:nvPr>
+            <p:ph type="body" idx="1"/>
+          </p:nvPr>
+        </p:nvSpPr>
+        <p:spPr>
+          <a:xfrm>
+            <a:off x="835100" y="5300194"/>
+            <a:ext cx="10556677" cy="1732508"/>
+          </a:xfrm>
+        </p:spPr>
+        <p:txBody>
+          <a:bodyPr/>
+          <a:lstStyle>
+            <a:lvl1pPr marL="0" indent="0">
+              <a:buNone/>
+              <a:defRPr sz="2772">
+                <a:solidFill>
+                  <a:schemeClr val="tx1"/>
+                </a:solidFill>
+              </a:defRPr>
+            </a:lvl1pPr>
+            <a:lvl2pPr marL="528020" indent="0">
+              <a:buNone/>
+              <a:defRPr sz="2310">
+                <a:solidFill>
+                  <a:schemeClr val="tx1">
+                    <a:tint val="75000"/>
+                  </a:schemeClr>
+                </a:solidFill>
+              </a:defRPr>
+            </a:lvl2pPr>
+            <a:lvl3pPr marL="1056041" indent="0">
+              <a:buNone/>
+              <a:defRPr sz="2079">
+                <a:solidFill>
+                  <a:schemeClr val="tx1">
+                    <a:tint val="75000"/>
+                  </a:schemeClr>
+                </a:solidFill>
+              </a:defRPr>
+            </a:lvl3pPr>
+            <a:lvl4pPr marL="1584061" indent="0">
+              <a:buNone/>
+              <a:defRPr sz="1848">
+                <a:solidFill>
+                  <a:schemeClr val="tx1">
+                    <a:tint val="75000"/>
+                  </a:schemeClr>
+                </a:solidFill>
+              </a:defRPr>
+            </a:lvl4pPr>
+            <a:lvl5pPr marL="2112081" indent="0">
+              <a:buNone/>
+              <a:defRPr sz="1848">
+                <a:solidFill>
+                  <a:schemeClr val="tx1">
+                    <a:tint val="75000"/>
+                  </a:schemeClr>
+                </a:solidFill>
+              </a:defRPr>
+            </a:lvl5pPr>
+            <a:lvl6pPr marL="2640101" indent="0">
+              <a:buNone/>
+              <a:defRPr sz="1848">
+                <a:solidFill>
+                  <a:schemeClr val="tx1">
+                    <a:tint val="75000"/>
+                  </a:schemeClr>
+                </a:solidFill>
+              </a:defRPr>
+            </a:lvl6pPr>
+            <a:lvl7pPr marL="3168122" indent="0">
+              <a:buNone/>
+              <a:defRPr sz="1848">
+                <a:solidFill>
+                  <a:schemeClr val="tx1">
+                    <a:tint val="75000"/>
+                  </a:schemeClr>
+                </a:solidFill>
+              </a:defRPr>
+            </a:lvl7pPr>
+            <a:lvl8pPr marL="3696142" indent="0">
+              <a:buNone/>
+              <a:defRPr sz="1848">
+                <a:solidFill>
+                  <a:schemeClr val="tx1">
+                    <a:tint val="75000"/>
+                  </a:schemeClr>
+                </a:solidFill>
+              </a:defRPr>
+            </a:lvl8pPr>
+            <a:lvl9pPr marL="4224162" indent="0">
+              <a:buNone/>
+              <a:defRPr sz="1848">
+                <a:solidFill>
+                  <a:schemeClr val="tx1">
+                    <a:tint val="75000"/>
+                  </a:schemeClr>
+                </a:solidFill>
+              </a:defRPr>
+            </a:lvl9pPr>
+          </a:lstStyle>
+          <a:p>
+            <a:pPr lvl="0"/>
+            <a:r>
+              <a:rPr lang="en-US"/>
+              <a:t>Click to edit Master text styles</a:t>
+            </a:r>
+          </a:p>
+        </p:txBody>
+      </p:sp>
+      <p:sp>
+        <p:nvSpPr>
+          <p:cNvPr id="4" name="Date Placeholder 3"/>
+          <p:cNvSpPr>
+            <a:spLocks noGrp="1"/>
+          </p:cNvSpPr>
+          <p:nvPr>
+            <p:ph type="dt" sz="half" idx="10"/>
+          </p:nvPr>
+        </p:nvSpPr>
+        <p:spPr/>
+        <p:txBody>
+          <a:bodyPr/>
+          <a:lstStyle/>
+          <a:p>
+            <a:fld id="{C764DE79-268F-4C1A-8933-263129D2AF90}" type="datetimeFigureOut">
+              <a:rPr lang="en-US" dirty="0"/>
+              <a:t>7/13/2026</a:t>
+            </a:fld>
+            <a:endParaRPr lang="en-US" dirty="0"/>
+          </a:p>
+        </p:txBody>
+      </p:sp>
+      <p:sp>
+        <p:nvSpPr>
+          <p:cNvPr id="5" name="Footer Placeholder 4"/>
+          <p:cNvSpPr>
+            <a:spLocks noGrp="1"/>
+          </p:cNvSpPr>
+          <p:nvPr>
+            <p:ph type="ftr" sz="quarter" idx="11"/>
+          </p:nvPr>
+        </p:nvSpPr>
+        <p:spPr/>
+        <p:txBody>
+          <a:bodyPr/>
+          <a:lstStyle/>
+          <a:p>
+            <a:endParaRPr lang="en-US" dirty="0"/>
+          </a:p>
+        </p:txBody>
+      </p:sp>
+      <p:sp>
+        <p:nvSpPr>
+          <p:cNvPr id="6" name="Slide Number Placeholder 5"/>
+          <p:cNvSpPr>
+            <a:spLocks noGrp="1"/>
+          </p:cNvSpPr>
+          <p:nvPr>
+            <p:ph type="sldNum" sz="quarter" idx="12"/>
+          </p:nvPr>
+        </p:nvSpPr>
+        <p:spPr/>
+        <p:txBody>
+          <a:bodyPr/>
+          <a:lstStyle/>
+          <a:p>
+            <a:fld id="{48F63A3B-78C7-47BE-AE5E-E10140E04643}" type="slidenum">
+              <a:rPr lang="en-US" dirty="0"/>
+              <a:t>‹#›</a:t>
+            </a:fld>
+            <a:endParaRPr lang="en-US" dirty="0"/>
+          </a:p>
+        </p:txBody>
+      </p:sp>
+    </p:spTree>
+    <p:extLst>
+      <p:ext uri="{BB962C8B-B14F-4D97-AF65-F5344CB8AC3E}">
+        <p14:creationId xmlns:p14="http://schemas.microsoft.com/office/powerpoint/2010/main" val="457449625"/>
+      </p:ext>
+    </p:extLst>
+  </p:cSld>
+  <p:clrMapOvr>
+    <a:masterClrMapping/>
+  </p:clrMapOvr>
+  <p:hf sldNum="0" hdr="0" ftr="0" dt="0"/>
+</p:sldLayout>
+</file>
+
+<file path=ppt/slideLayouts/slideLayout4.xml><?xml version="1.0" encoding="utf-8"?>
+<p:sldLayout xmlns:a="http://schemas.openxmlformats.org/drawingml/2006/main" xmlns:r="http://schemas.openxmlformats.org/officeDocument/2006/relationships" xmlns:p="http://schemas.openxmlformats.org/presentationml/2006/main" type="twoObj" preserve="1">
+  <p:cSld name="Two Content">
+    <p:spTree>
+      <p:nvGrpSpPr>
+        <p:cNvPr id="1" name=""/>
+        <p:cNvGrpSpPr/>
+        <p:nvPr/>
+      </p:nvGrpSpPr>
+      <p:grpSpPr>
+        <a:xfrm>
+          <a:off x="0" y="0"/>
+          <a:ext cx="0" cy="0"/>
+          <a:chOff x="0" y="0"/>
+          <a:chExt cx="0" cy="0"/>
+        </a:xfrm>
+      </p:grpSpPr>
+      <p:sp>
+        <p:nvSpPr>
+          <p:cNvPr id="2" name="Title 1"/>
+          <p:cNvSpPr>
+            <a:spLocks noGrp="1"/>
+          </p:cNvSpPr>
+          <p:nvPr>
+            <p:ph type="title"/>
+          </p:nvPr>
+        </p:nvSpPr>
+        <p:spPr/>
+        <p:txBody>
+          <a:bodyPr/>
+          <a:lstStyle/>
+          <a:p>
+            <a:r>
+              <a:rPr lang="en-US"/>
+              <a:t>Click to edit Master title style</a:t>
+            </a:r>
+            <a:endParaRPr lang="en-US" dirty="0"/>
+          </a:p>
+        </p:txBody>
+      </p:sp>
+      <p:sp>
+        <p:nvSpPr>
+          <p:cNvPr id="3" name="Content Placeholder 2"/>
+          <p:cNvSpPr>
+            <a:spLocks noGrp="1"/>
+          </p:cNvSpPr>
+          <p:nvPr>
+            <p:ph sz="half" idx="1"/>
+          </p:nvPr>
+        </p:nvSpPr>
+        <p:spPr>
+          <a:xfrm>
+            <a:off x="841474" y="2108344"/>
+            <a:ext cx="5201841" cy="5025191"/>
+          </a:xfrm>
+        </p:spPr>
+        <p:txBody>
+          <a:bodyPr/>
+          <a:lstStyle/>
+          <a:p>
+            <a:pPr lvl="0"/>
+            <a:r>
+              <a:rPr lang="en-US"/>
+              <a:t>Click to edit Master text styles</a:t>
+            </a:r>
+          </a:p>
+          <a:p>
+            <a:pPr lvl="1"/>
+            <a:r>
+              <a:rPr lang="en-US"/>
+              <a:t>Second level</a:t>
+            </a:r>
+          </a:p>
+          <a:p>
+            <a:pPr lvl="2"/>
+            <a:r>
+              <a:rPr lang="en-US"/>
+              <a:t>Third level</a:t>
+            </a:r>
+          </a:p>
+          <a:p>
+            <a:pPr lvl="3"/>
+            <a:r>
+              <a:rPr lang="en-US"/>
+              <a:t>Fourth level</a:t>
+            </a:r>
+          </a:p>
+          <a:p>
+            <a:pPr lvl="4"/>
+            <a:r>
+              <a:rPr lang="en-US"/>
+              <a:t>Fifth level</a:t>
+            </a:r>
+            <a:endParaRPr lang="en-US" dirty="0"/>
+          </a:p>
+        </p:txBody>
+      </p:sp>
+      <p:sp>
+        <p:nvSpPr>
+          <p:cNvPr id="4" name="Content Placeholder 3"/>
+          <p:cNvSpPr>
+            <a:spLocks noGrp="1"/>
+          </p:cNvSpPr>
+          <p:nvPr>
+            <p:ph sz="half" idx="2"/>
+          </p:nvPr>
+        </p:nvSpPr>
+        <p:spPr>
+          <a:xfrm>
+            <a:off x="6196310" y="2108344"/>
+            <a:ext cx="5201841" cy="5025191"/>
+          </a:xfrm>
+        </p:spPr>
+        <p:txBody>
+          <a:bodyPr/>
+          <a:lstStyle/>
+          <a:p>
+            <a:pPr lvl="0"/>
+            <a:r>
+              <a:rPr lang="en-US"/>
+              <a:t>Click to edit Master text styles</a:t>
+            </a:r>
+          </a:p>
+          <a:p>
+            <a:pPr lvl="1"/>
+            <a:r>
+              <a:rPr lang="en-US"/>
+              <a:t>Second level</a:t>
+            </a:r>
+          </a:p>
+          <a:p>
+            <a:pPr lvl="2"/>
+            <a:r>
+              <a:rPr lang="en-US"/>
+              <a:t>Third level</a:t>
+            </a:r>
+          </a:p>
+          <a:p>
+            <a:pPr lvl="3"/>
+            <a:r>
+              <a:rPr lang="en-US"/>
+              <a:t>Fourth level</a:t>
+            </a:r>
+          </a:p>
+          <a:p>
+            <a:pPr lvl="4"/>
+            <a:r>
+              <a:rPr lang="en-US"/>
+              <a:t>Fifth level</a:t>
+            </a:r>
+            <a:endParaRPr lang="en-US" dirty="0"/>
+          </a:p>
+        </p:txBody>
+      </p:sp>
+      <p:sp>
+        <p:nvSpPr>
+          <p:cNvPr id="5" name="Date Placeholder 4"/>
+          <p:cNvSpPr>
+            <a:spLocks noGrp="1"/>
+          </p:cNvSpPr>
+          <p:nvPr>
+            <p:ph type="dt" sz="half" idx="10"/>
+          </p:nvPr>
+        </p:nvSpPr>
+        <p:spPr/>
+        <p:txBody>
+          <a:bodyPr/>
+          <a:lstStyle/>
+          <a:p>
+            <a:fld id="{C764DE79-268F-4C1A-8933-263129D2AF90}" type="datetimeFigureOut">
+              <a:rPr lang="en-US" dirty="0"/>
+              <a:t>7/13/2026</a:t>
+            </a:fld>
+            <a:endParaRPr lang="en-US" dirty="0"/>
+          </a:p>
+        </p:txBody>
+      </p:sp>
+      <p:sp>
+        <p:nvSpPr>
+          <p:cNvPr id="6" name="Footer Placeholder 5"/>
+          <p:cNvSpPr>
+            <a:spLocks noGrp="1"/>
+          </p:cNvSpPr>
+          <p:nvPr>
+            <p:ph type="ftr" sz="quarter" idx="11"/>
+          </p:nvPr>
+        </p:nvSpPr>
+        <p:spPr/>
+        <p:txBody>
+          <a:bodyPr/>
+          <a:lstStyle/>
+          <a:p>
+            <a:endParaRPr lang="en-US" dirty="0"/>
+          </a:p>
+        </p:txBody>
+      </p:sp>
+      <p:sp>
+        <p:nvSpPr>
+          <p:cNvPr id="7" name="Slide Number Placeholder 6"/>
+          <p:cNvSpPr>
+            <a:spLocks noGrp="1"/>
+          </p:cNvSpPr>
+          <p:nvPr>
+            <p:ph type="sldNum" sz="quarter" idx="12"/>
+          </p:nvPr>
+        </p:nvSpPr>
+        <p:spPr/>
+        <p:txBody>
+          <a:bodyPr/>
+          <a:lstStyle/>
+          <a:p>
+            <a:fld id="{48F63A3B-78C7-47BE-AE5E-E10140E04643}" type="slidenum">
+              <a:rPr lang="en-US" dirty="0"/>
+              <a:t>‹#›</a:t>
+            </a:fld>
+            <a:endParaRPr lang="en-US" dirty="0"/>
+          </a:p>
+        </p:txBody>
+      </p:sp>
+    </p:spTree>
+    <p:extLst>
+      <p:ext uri="{BB962C8B-B14F-4D97-AF65-F5344CB8AC3E}">
+        <p14:creationId xmlns:p14="http://schemas.microsoft.com/office/powerpoint/2010/main" val="3542275539"/>
+      </p:ext>
+    </p:extLst>
+  </p:cSld>
+  <p:clrMapOvr>
+    <a:masterClrMapping/>
+  </p:clrMapOvr>
+  <p:hf sldNum="0" hdr="0" ftr="0" dt="0"/>
+</p:sldLayout>
+</file>
+
+<file path=ppt/slideLayouts/slideLayout5.xml><?xml version="1.0" encoding="utf-8"?>
+<p:sldLayout xmlns:a="http://schemas.openxmlformats.org/drawingml/2006/main" xmlns:r="http://schemas.openxmlformats.org/officeDocument/2006/relationships" xmlns:p="http://schemas.openxmlformats.org/presentationml/2006/main" type="twoTxTwoObj" preserve="1">
+  <p:cSld name="Comparison">
+    <p:spTree>
+      <p:nvGrpSpPr>
+        <p:cNvPr id="1" name=""/>
+        <p:cNvGrpSpPr/>
+        <p:nvPr/>
+      </p:nvGrpSpPr>
+      <p:grpSpPr>
+        <a:xfrm>
+          <a:off x="0" y="0"/>
+          <a:ext cx="0" cy="0"/>
+          <a:chOff x="0" y="0"/>
+          <a:chExt cx="0" cy="0"/>
+        </a:xfrm>
+      </p:grpSpPr>
+      <p:sp>
+        <p:nvSpPr>
+          <p:cNvPr id="2" name="Title 1"/>
+          <p:cNvSpPr>
+            <a:spLocks noGrp="1"/>
+          </p:cNvSpPr>
+          <p:nvPr>
+            <p:ph type="title"/>
+          </p:nvPr>
+        </p:nvSpPr>
+        <p:spPr>
+          <a:xfrm>
+            <a:off x="843068" y="421671"/>
+            <a:ext cx="10556677" cy="1530841"/>
+          </a:xfrm>
+        </p:spPr>
+        <p:txBody>
+          <a:bodyPr/>
+          <a:lstStyle/>
+          <a:p>
+            <a:r>
+              <a:rPr lang="en-US"/>
+              <a:t>Click to edit Master title style</a:t>
+            </a:r>
+            <a:endParaRPr lang="en-US" dirty="0"/>
+          </a:p>
+        </p:txBody>
+      </p:sp>
+      <p:sp>
+        <p:nvSpPr>
+          <p:cNvPr id="3" name="Text Placeholder 2"/>
+          <p:cNvSpPr>
+            <a:spLocks noGrp="1"/>
+          </p:cNvSpPr>
+          <p:nvPr>
+            <p:ph type="body" idx="1"/>
+          </p:nvPr>
+        </p:nvSpPr>
+        <p:spPr>
+          <a:xfrm>
+            <a:off x="843070" y="1941510"/>
+            <a:ext cx="5177934" cy="951504"/>
+          </a:xfrm>
+        </p:spPr>
+        <p:txBody>
+          <a:bodyPr anchor="b"/>
+          <a:lstStyle>
+            <a:lvl1pPr marL="0" indent="0">
+              <a:buNone/>
+              <a:defRPr sz="2772" b="1"/>
+            </a:lvl1pPr>
+            <a:lvl2pPr marL="528020" indent="0">
+              <a:buNone/>
+              <a:defRPr sz="2310" b="1"/>
+            </a:lvl2pPr>
+            <a:lvl3pPr marL="1056041" indent="0">
+              <a:buNone/>
+              <a:defRPr sz="2079" b="1"/>
+            </a:lvl3pPr>
+            <a:lvl4pPr marL="1584061" indent="0">
+              <a:buNone/>
+              <a:defRPr sz="1848" b="1"/>
+            </a:lvl4pPr>
+            <a:lvl5pPr marL="2112081" indent="0">
+              <a:buNone/>
+              <a:defRPr sz="1848" b="1"/>
+            </a:lvl5pPr>
+            <a:lvl6pPr marL="2640101" indent="0">
+              <a:buNone/>
+              <a:defRPr sz="1848" b="1"/>
+            </a:lvl6pPr>
+            <a:lvl7pPr marL="3168122" indent="0">
+              <a:buNone/>
+              <a:defRPr sz="1848" b="1"/>
+            </a:lvl7pPr>
+            <a:lvl8pPr marL="3696142" indent="0">
+              <a:buNone/>
+              <a:defRPr sz="1848" b="1"/>
+            </a:lvl8pPr>
+            <a:lvl9pPr marL="4224162" indent="0">
+              <a:buNone/>
+              <a:defRPr sz="1848" b="1"/>
+            </a:lvl9pPr>
+          </a:lstStyle>
+          <a:p>
+            <a:pPr lvl="0"/>
+            <a:r>
+              <a:rPr lang="en-US"/>
+              <a:t>Click to edit Master text styles</a:t>
+            </a:r>
+          </a:p>
+        </p:txBody>
+      </p:sp>
+      <p:sp>
+        <p:nvSpPr>
+          <p:cNvPr id="4" name="Content Placeholder 3"/>
+          <p:cNvSpPr>
+            <a:spLocks noGrp="1"/>
+          </p:cNvSpPr>
+          <p:nvPr>
+            <p:ph sz="half" idx="2"/>
+          </p:nvPr>
+        </p:nvSpPr>
+        <p:spPr>
+          <a:xfrm>
+            <a:off x="843070" y="2893014"/>
+            <a:ext cx="5177934" cy="4255188"/>
+          </a:xfrm>
+        </p:spPr>
+        <p:txBody>
+          <a:bodyPr/>
+          <a:lstStyle/>
+          <a:p>
+            <a:pPr lvl="0"/>
+            <a:r>
+              <a:rPr lang="en-US"/>
+              <a:t>Click to edit Master text styles</a:t>
+            </a:r>
+          </a:p>
+          <a:p>
+            <a:pPr lvl="1"/>
+            <a:r>
+              <a:rPr lang="en-US"/>
+              <a:t>Second level</a:t>
+            </a:r>
+          </a:p>
+          <a:p>
+            <a:pPr lvl="2"/>
+            <a:r>
+              <a:rPr lang="en-US"/>
+              <a:t>Third level</a:t>
+            </a:r>
+          </a:p>
+          <a:p>
+            <a:pPr lvl="3"/>
+            <a:r>
+              <a:rPr lang="en-US"/>
+              <a:t>Fourth level</a:t>
+            </a:r>
+          </a:p>
+          <a:p>
+            <a:pPr lvl="4"/>
+            <a:r>
+              <a:rPr lang="en-US"/>
+              <a:t>Fifth level</a:t>
+            </a:r>
+            <a:endParaRPr lang="en-US" dirty="0"/>
+          </a:p>
+        </p:txBody>
+      </p:sp>
+      <p:sp>
+        <p:nvSpPr>
+          <p:cNvPr id="5" name="Text Placeholder 4"/>
+          <p:cNvSpPr>
+            <a:spLocks noGrp="1"/>
+          </p:cNvSpPr>
+          <p:nvPr>
+            <p:ph type="body" sz="quarter" idx="3"/>
+          </p:nvPr>
+        </p:nvSpPr>
+        <p:spPr>
+          <a:xfrm>
+            <a:off x="6196311" y="1941510"/>
+            <a:ext cx="5203435" cy="951504"/>
+          </a:xfrm>
+        </p:spPr>
+        <p:txBody>
+          <a:bodyPr anchor="b"/>
+          <a:lstStyle>
+            <a:lvl1pPr marL="0" indent="0">
+              <a:buNone/>
+              <a:defRPr sz="2772" b="1"/>
+            </a:lvl1pPr>
+            <a:lvl2pPr marL="528020" indent="0">
+              <a:buNone/>
+              <a:defRPr sz="2310" b="1"/>
+            </a:lvl2pPr>
+            <a:lvl3pPr marL="1056041" indent="0">
+              <a:buNone/>
+              <a:defRPr sz="2079" b="1"/>
+            </a:lvl3pPr>
+            <a:lvl4pPr marL="1584061" indent="0">
+              <a:buNone/>
+              <a:defRPr sz="1848" b="1"/>
+            </a:lvl4pPr>
+            <a:lvl5pPr marL="2112081" indent="0">
+              <a:buNone/>
+              <a:defRPr sz="1848" b="1"/>
+            </a:lvl5pPr>
+            <a:lvl6pPr marL="2640101" indent="0">
+              <a:buNone/>
+              <a:defRPr sz="1848" b="1"/>
+            </a:lvl6pPr>
+            <a:lvl7pPr marL="3168122" indent="0">
+              <a:buNone/>
+              <a:defRPr sz="1848" b="1"/>
+            </a:lvl7pPr>
+            <a:lvl8pPr marL="3696142" indent="0">
+              <a:buNone/>
+              <a:defRPr sz="1848" b="1"/>
+            </a:lvl8pPr>
+            <a:lvl9pPr marL="4224162" indent="0">
+              <a:buNone/>
+              <a:defRPr sz="1848" b="1"/>
+            </a:lvl9pPr>
+          </a:lstStyle>
+          <a:p>
+            <a:pPr lvl="0"/>
+            <a:r>
+              <a:rPr lang="en-US"/>
+              <a:t>Click to edit Master text styles</a:t>
+            </a:r>
+          </a:p>
+        </p:txBody>
+      </p:sp>
+      <p:sp>
+        <p:nvSpPr>
+          <p:cNvPr id="6" name="Content Placeholder 5"/>
+          <p:cNvSpPr>
+            <a:spLocks noGrp="1"/>
+          </p:cNvSpPr>
+          <p:nvPr>
+            <p:ph sz="quarter" idx="4"/>
+          </p:nvPr>
+        </p:nvSpPr>
+        <p:spPr>
+          <a:xfrm>
+            <a:off x="6196311" y="2893014"/>
+            <a:ext cx="5203435" cy="4255188"/>
+          </a:xfrm>
+        </p:spPr>
+        <p:txBody>
+          <a:bodyPr/>
+          <a:lstStyle/>
+          <a:p>
+            <a:pPr lvl="0"/>
+            <a:r>
+              <a:rPr lang="en-US"/>
+              <a:t>Click to edit Master text styles</a:t>
+            </a:r>
+          </a:p>
+          <a:p>
+            <a:pPr lvl="1"/>
+            <a:r>
+              <a:rPr lang="en-US"/>
+              <a:t>Second level</a:t>
+            </a:r>
+          </a:p>
+          <a:p>
+            <a:pPr lvl="2"/>
+            <a:r>
+              <a:rPr lang="en-US"/>
+              <a:t>Third level</a:t>
+            </a:r>
+          </a:p>
+          <a:p>
+            <a:pPr lvl="3"/>
+            <a:r>
+              <a:rPr lang="en-US"/>
+              <a:t>Fourth level</a:t>
+            </a:r>
+          </a:p>
+          <a:p>
+            <a:pPr lvl="4"/>
+            <a:r>
+              <a:rPr lang="en-US"/>
+              <a:t>Fifth level</a:t>
+            </a:r>
+            <a:endParaRPr lang="en-US" dirty="0"/>
+          </a:p>
+        </p:txBody>
+      </p:sp>
+      <p:sp>
+        <p:nvSpPr>
+          <p:cNvPr id="7" name="Date Placeholder 6"/>
+          <p:cNvSpPr>
+            <a:spLocks noGrp="1"/>
+          </p:cNvSpPr>
+          <p:nvPr>
+            <p:ph type="dt" sz="half" idx="10"/>
+          </p:nvPr>
+        </p:nvSpPr>
+        <p:spPr/>
+        <p:txBody>
+          <a:bodyPr/>
+          <a:lstStyle/>
+          <a:p>
+            <a:fld id="{C764DE79-268F-4C1A-8933-263129D2AF90}" type="datetimeFigureOut">
+              <a:rPr lang="en-US" dirty="0"/>
+              <a:t>7/13/2026</a:t>
+            </a:fld>
+            <a:endParaRPr lang="en-US" dirty="0"/>
+          </a:p>
+        </p:txBody>
+      </p:sp>
+      <p:sp>
+        <p:nvSpPr>
+          <p:cNvPr id="8" name="Footer Placeholder 7"/>
+          <p:cNvSpPr>
+            <a:spLocks noGrp="1"/>
+          </p:cNvSpPr>
+          <p:nvPr>
+            <p:ph type="ftr" sz="quarter" idx="11"/>
+          </p:nvPr>
+        </p:nvSpPr>
+        <p:spPr/>
+        <p:txBody>
+          <a:bodyPr/>
+          <a:lstStyle/>
+          <a:p>
+            <a:endParaRPr lang="en-US" dirty="0"/>
+          </a:p>
+        </p:txBody>
+      </p:sp>
+      <p:sp>
+        <p:nvSpPr>
+          <p:cNvPr id="9" name="Slide Number Placeholder 8"/>
+          <p:cNvSpPr>
+            <a:spLocks noGrp="1"/>
+          </p:cNvSpPr>
+          <p:nvPr>
+            <p:ph type="sldNum" sz="quarter" idx="12"/>
+          </p:nvPr>
+        </p:nvSpPr>
+        <p:spPr/>
+        <p:txBody>
+          <a:bodyPr/>
+          <a:lstStyle/>
+          <a:p>
+            <a:fld id="{48F63A3B-78C7-47BE-AE5E-E10140E04643}" type="slidenum">
+              <a:rPr lang="en-US" dirty="0"/>
+              <a:t>‹#›</a:t>
+            </a:fld>
+            <a:endParaRPr lang="en-US" dirty="0"/>
+          </a:p>
+        </p:txBody>
+      </p:sp>
+    </p:spTree>
+    <p:extLst>
+      <p:ext uri="{BB962C8B-B14F-4D97-AF65-F5344CB8AC3E}">
+        <p14:creationId xmlns:p14="http://schemas.microsoft.com/office/powerpoint/2010/main" val="1706449061"/>
+      </p:ext>
+    </p:extLst>
+  </p:cSld>
+  <p:clrMapOvr>
+    <a:masterClrMapping/>
+  </p:clrMapOvr>
+  <p:hf sldNum="0" hdr="0" ftr="0" dt="0"/>
+</p:sldLayout>
+</file>
+
+<file path=ppt/slideLayouts/slideLayout6.xml><?xml version="1.0" encoding="utf-8"?>
+<p:sldLayout xmlns:a="http://schemas.openxmlformats.org/drawingml/2006/main" xmlns:r="http://schemas.openxmlformats.org/officeDocument/2006/relationships" xmlns:p="http://schemas.openxmlformats.org/presentationml/2006/main" type="titleOnly" preserve="1">
+  <p:cSld name="Title Only">
+    <p:spTree>
+      <p:nvGrpSpPr>
+        <p:cNvPr id="1" name=""/>
+        <p:cNvGrpSpPr/>
+        <p:nvPr/>
+      </p:nvGrpSpPr>
+      <p:grpSpPr>
+        <a:xfrm>
+          <a:off x="0" y="0"/>
+          <a:ext cx="0" cy="0"/>
+          <a:chOff x="0" y="0"/>
+          <a:chExt cx="0" cy="0"/>
+        </a:xfrm>
+      </p:grpSpPr>
+      <p:sp>
+        <p:nvSpPr>
+          <p:cNvPr id="2" name="Title 1"/>
+          <p:cNvSpPr>
+            <a:spLocks noGrp="1"/>
+          </p:cNvSpPr>
+          <p:nvPr>
+            <p:ph type="title"/>
+          </p:nvPr>
+        </p:nvSpPr>
+        <p:spPr/>
+        <p:txBody>
+          <a:bodyPr/>
+          <a:lstStyle/>
+          <a:p>
+            <a:r>
+              <a:rPr lang="en-US"/>
+              <a:t>Click to edit Master title style</a:t>
+            </a:r>
+            <a:endParaRPr lang="en-US" dirty="0"/>
+          </a:p>
+        </p:txBody>
+      </p:sp>
+      <p:sp>
+        <p:nvSpPr>
+          <p:cNvPr id="3" name="Date Placeholder 2"/>
+          <p:cNvSpPr>
+            <a:spLocks noGrp="1"/>
+          </p:cNvSpPr>
+          <p:nvPr>
+            <p:ph type="dt" sz="half" idx="10"/>
+          </p:nvPr>
+        </p:nvSpPr>
+        <p:spPr/>
+        <p:txBody>
+          <a:bodyPr/>
+          <a:lstStyle/>
+          <a:p>
+            <a:fld id="{C764DE79-268F-4C1A-8933-263129D2AF90}" type="datetimeFigureOut">
+              <a:rPr lang="en-US" dirty="0"/>
+              <a:t>7/13/2026</a:t>
+            </a:fld>
+            <a:endParaRPr lang="en-US" dirty="0"/>
+          </a:p>
+        </p:txBody>
+      </p:sp>
+      <p:sp>
+        <p:nvSpPr>
+          <p:cNvPr id="4" name="Footer Placeholder 3"/>
+          <p:cNvSpPr>
+            <a:spLocks noGrp="1"/>
+          </p:cNvSpPr>
+          <p:nvPr>
+            <p:ph type="ftr" sz="quarter" idx="11"/>
+          </p:nvPr>
+        </p:nvSpPr>
+        <p:spPr/>
+        <p:txBody>
+          <a:bodyPr/>
+          <a:lstStyle/>
+          <a:p>
+            <a:endParaRPr lang="en-US" dirty="0"/>
+          </a:p>
+        </p:txBody>
+      </p:sp>
+      <p:sp>
+        <p:nvSpPr>
+          <p:cNvPr id="5" name="Slide Number Placeholder 4"/>
+          <p:cNvSpPr>
+            <a:spLocks noGrp="1"/>
+          </p:cNvSpPr>
+          <p:nvPr>
+            <p:ph type="sldNum" sz="quarter" idx="12"/>
+          </p:nvPr>
+        </p:nvSpPr>
+        <p:spPr/>
+        <p:txBody>
+          <a:bodyPr/>
+          <a:lstStyle/>
+          <a:p>
+            <a:fld id="{48F63A3B-78C7-47BE-AE5E-E10140E04643}" type="slidenum">
+              <a:rPr lang="en-US" dirty="0"/>
+              <a:t>‹#›</a:t>
+            </a:fld>
+            <a:endParaRPr lang="en-US" dirty="0"/>
+          </a:p>
+        </p:txBody>
+      </p:sp>
+    </p:spTree>
+    <p:extLst>
+      <p:ext uri="{BB962C8B-B14F-4D97-AF65-F5344CB8AC3E}">
+        <p14:creationId xmlns:p14="http://schemas.microsoft.com/office/powerpoint/2010/main" val="327874007"/>
+      </p:ext>
+    </p:extLst>
+  </p:cSld>
+  <p:clrMapOvr>
+    <a:masterClrMapping/>
+  </p:clrMapOvr>
+  <p:hf sldNum="0" hdr="0" ftr="0" dt="0"/>
+</p:sldLayout>
+</file>
+
+<file path=ppt/slideLayouts/slideLayout7.xml><?xml version="1.0" encoding="utf-8"?>
+<p:sldLayout xmlns:a="http://schemas.openxmlformats.org/drawingml/2006/main" xmlns:r="http://schemas.openxmlformats.org/officeDocument/2006/relationships" xmlns:p="http://schemas.openxmlformats.org/presentationml/2006/main" type="blank" preserve="1">
+  <p:cSld name="Blank">
+    <p:spTree>
+      <p:nvGrpSpPr>
+        <p:cNvPr id="1" name=""/>
+        <p:cNvGrpSpPr/>
+        <p:nvPr/>
+      </p:nvGrpSpPr>
+      <p:grpSpPr>
+        <a:xfrm>
+          <a:off x="0" y="0"/>
+          <a:ext cx="0" cy="0"/>
+          <a:chOff x="0" y="0"/>
+          <a:chExt cx="0" cy="0"/>
+        </a:xfrm>
+      </p:grpSpPr>
+      <p:sp>
+        <p:nvSpPr>
+          <p:cNvPr id="2" name="Date Placeholder 1"/>
+          <p:cNvSpPr>
+            <a:spLocks noGrp="1"/>
+          </p:cNvSpPr>
+          <p:nvPr>
+            <p:ph type="dt" sz="half" idx="10"/>
+          </p:nvPr>
+        </p:nvSpPr>
+        <p:spPr/>
+        <p:txBody>
+          <a:bodyPr/>
+          <a:lstStyle/>
+          <a:p>
+            <a:fld id="{C764DE79-268F-4C1A-8933-263129D2AF90}" type="datetimeFigureOut">
+              <a:rPr lang="en-US" dirty="0"/>
+              <a:t>7/13/2026</a:t>
+            </a:fld>
+            <a:endParaRPr lang="en-US" dirty="0"/>
+          </a:p>
+        </p:txBody>
+      </p:sp>
+      <p:sp>
+        <p:nvSpPr>
+          <p:cNvPr id="3" name="Footer Placeholder 2"/>
+          <p:cNvSpPr>
+            <a:spLocks noGrp="1"/>
+          </p:cNvSpPr>
+          <p:nvPr>
+            <p:ph type="ftr" sz="quarter" idx="11"/>
+          </p:nvPr>
+        </p:nvSpPr>
+        <p:spPr/>
+        <p:txBody>
+          <a:bodyPr/>
+          <a:lstStyle/>
+          <a:p>
+            <a:endParaRPr lang="en-US" dirty="0"/>
+          </a:p>
+        </p:txBody>
+      </p:sp>
+      <p:sp>
+        <p:nvSpPr>
+          <p:cNvPr id="4" name="Slide Number Placeholder 3"/>
+          <p:cNvSpPr>
+            <a:spLocks noGrp="1"/>
+          </p:cNvSpPr>
+          <p:nvPr>
+            <p:ph type="sldNum" sz="quarter" idx="12"/>
+          </p:nvPr>
+        </p:nvSpPr>
+        <p:spPr/>
+        <p:txBody>
+          <a:bodyPr/>
+          <a:lstStyle/>
+          <a:p>
+            <a:fld id="{48F63A3B-78C7-47BE-AE5E-E10140E04643}" type="slidenum">
+              <a:rPr lang="en-US" dirty="0"/>
+              <a:t>‹#›</a:t>
+            </a:fld>
+            <a:endParaRPr lang="en-US" dirty="0"/>
+          </a:p>
+        </p:txBody>
+      </p:sp>
+    </p:spTree>
+    <p:extLst>
+      <p:ext uri="{BB962C8B-B14F-4D97-AF65-F5344CB8AC3E}">
+        <p14:creationId xmlns:p14="http://schemas.microsoft.com/office/powerpoint/2010/main" val="1551347712"/>
+      </p:ext>
+    </p:extLst>
+  </p:cSld>
+  <p:clrMapOvr>
+    <a:masterClrMapping/>
+  </p:clrMapOvr>
+  <p:hf sldNum="0" hdr="0" ftr="0" dt="0"/>
+</p:sldLayout>
+</file>
+
+<file path=ppt/slideLayouts/slideLayout8.xml><?xml version="1.0" encoding="utf-8"?>
+<p:sldLayout xmlns:a="http://schemas.openxmlformats.org/drawingml/2006/main" xmlns:r="http://schemas.openxmlformats.org/officeDocument/2006/relationships" xmlns:p="http://schemas.openxmlformats.org/presentationml/2006/main" type="objTx" preserve="1">
+  <p:cSld name="Content with Caption">
+    <p:spTree>
+      <p:nvGrpSpPr>
+        <p:cNvPr id="1" name=""/>
+        <p:cNvGrpSpPr/>
+        <p:nvPr/>
+      </p:nvGrpSpPr>
+      <p:grpSpPr>
+        <a:xfrm>
+          <a:off x="0" y="0"/>
+          <a:ext cx="0" cy="0"/>
+          <a:chOff x="0" y="0"/>
+          <a:chExt cx="0" cy="0"/>
+        </a:xfrm>
+      </p:grpSpPr>
+      <p:sp>
+        <p:nvSpPr>
+          <p:cNvPr id="2" name="Title 1"/>
+          <p:cNvSpPr>
+            <a:spLocks noGrp="1"/>
+          </p:cNvSpPr>
+          <p:nvPr>
+            <p:ph type="title"/>
+          </p:nvPr>
+        </p:nvSpPr>
+        <p:spPr>
+          <a:xfrm>
+            <a:off x="843068" y="528002"/>
+            <a:ext cx="3947598" cy="1848009"/>
+          </a:xfrm>
+        </p:spPr>
+        <p:txBody>
+          <a:bodyPr anchor="b"/>
+          <a:lstStyle>
+            <a:lvl1pPr>
+              <a:defRPr sz="3696"/>
+            </a:lvl1pPr>
+          </a:lstStyle>
+          <a:p>
+            <a:r>
+              <a:rPr lang="en-US"/>
+              <a:t>Click to edit Master title style</a:t>
+            </a:r>
+            <a:endParaRPr lang="en-US" dirty="0"/>
+          </a:p>
+        </p:txBody>
+      </p:sp>
+      <p:sp>
+        <p:nvSpPr>
+          <p:cNvPr id="3" name="Content Placeholder 2"/>
+          <p:cNvSpPr>
+            <a:spLocks noGrp="1"/>
+          </p:cNvSpPr>
+          <p:nvPr>
+            <p:ph idx="1"/>
+          </p:nvPr>
+        </p:nvSpPr>
+        <p:spPr>
+          <a:xfrm>
+            <a:off x="5203435" y="1140341"/>
+            <a:ext cx="6196310" cy="5628360"/>
+          </a:xfrm>
+        </p:spPr>
+        <p:txBody>
+          <a:bodyPr/>
+          <a:lstStyle>
+            <a:lvl1pPr>
+              <a:defRPr sz="3696"/>
+            </a:lvl1pPr>
+            <a:lvl2pPr>
+              <a:defRPr sz="3234"/>
+            </a:lvl2pPr>
+            <a:lvl3pPr>
+              <a:defRPr sz="2772"/>
+            </a:lvl3pPr>
+            <a:lvl4pPr>
+              <a:defRPr sz="2310"/>
+            </a:lvl4pPr>
+            <a:lvl5pPr>
+              <a:defRPr sz="2310"/>
+            </a:lvl5pPr>
+            <a:lvl6pPr>
+              <a:defRPr sz="2310"/>
+            </a:lvl6pPr>
+            <a:lvl7pPr>
+              <a:defRPr sz="2310"/>
+            </a:lvl7pPr>
+            <a:lvl8pPr>
+              <a:defRPr sz="2310"/>
+            </a:lvl8pPr>
+            <a:lvl9pPr>
+              <a:defRPr sz="2310"/>
+            </a:lvl9pPr>
+          </a:lstStyle>
+          <a:p>
+            <a:pPr lvl="0"/>
+            <a:r>
+              <a:rPr lang="en-US"/>
+              <a:t>Click to edit Master text styles</a:t>
+            </a:r>
+          </a:p>
+          <a:p>
+            <a:pPr lvl="1"/>
+            <a:r>
+              <a:rPr lang="en-US"/>
+              <a:t>Second level</a:t>
+            </a:r>
+          </a:p>
+          <a:p>
+            <a:pPr lvl="2"/>
+            <a:r>
+              <a:rPr lang="en-US"/>
+              <a:t>Third level</a:t>
+            </a:r>
+          </a:p>
+          <a:p>
+            <a:pPr lvl="3"/>
+            <a:r>
+              <a:rPr lang="en-US"/>
+              <a:t>Fourth level</a:t>
+            </a:r>
+          </a:p>
+          <a:p>
+            <a:pPr lvl="4"/>
+            <a:r>
+              <a:rPr lang="en-US"/>
+              <a:t>Fifth level</a:t>
+            </a:r>
+            <a:endParaRPr lang="en-US" dirty="0"/>
+          </a:p>
+        </p:txBody>
+      </p:sp>
+      <p:sp>
+        <p:nvSpPr>
+          <p:cNvPr id="4" name="Text Placeholder 3"/>
+          <p:cNvSpPr>
+            <a:spLocks noGrp="1"/>
+          </p:cNvSpPr>
+          <p:nvPr>
+            <p:ph type="body" sz="half" idx="2"/>
+          </p:nvPr>
+        </p:nvSpPr>
+        <p:spPr>
+          <a:xfrm>
+            <a:off x="843068" y="2376011"/>
+            <a:ext cx="3947598" cy="4401855"/>
+          </a:xfrm>
+        </p:spPr>
+        <p:txBody>
+          <a:bodyPr/>
+          <a:lstStyle>
+            <a:lvl1pPr marL="0" indent="0">
+              <a:buNone/>
+              <a:defRPr sz="1848"/>
+            </a:lvl1pPr>
+            <a:lvl2pPr marL="528020" indent="0">
+              <a:buNone/>
+              <a:defRPr sz="1617"/>
+            </a:lvl2pPr>
+            <a:lvl3pPr marL="1056041" indent="0">
+              <a:buNone/>
+              <a:defRPr sz="1386"/>
+            </a:lvl3pPr>
+            <a:lvl4pPr marL="1584061" indent="0">
+              <a:buNone/>
+              <a:defRPr sz="1155"/>
+            </a:lvl4pPr>
+            <a:lvl5pPr marL="2112081" indent="0">
+              <a:buNone/>
+              <a:defRPr sz="1155"/>
+            </a:lvl5pPr>
+            <a:lvl6pPr marL="2640101" indent="0">
+              <a:buNone/>
+              <a:defRPr sz="1155"/>
+            </a:lvl6pPr>
+            <a:lvl7pPr marL="3168122" indent="0">
+              <a:buNone/>
+              <a:defRPr sz="1155"/>
+            </a:lvl7pPr>
+            <a:lvl8pPr marL="3696142" indent="0">
+              <a:buNone/>
+              <a:defRPr sz="1155"/>
+            </a:lvl8pPr>
+            <a:lvl9pPr marL="4224162" indent="0">
+              <a:buNone/>
+              <a:defRPr sz="1155"/>
+            </a:lvl9pPr>
+          </a:lstStyle>
+          <a:p>
+            <a:pPr lvl="0"/>
+            <a:r>
+              <a:rPr lang="en-US"/>
+              <a:t>Click to edit Master text styles</a:t>
+            </a:r>
+          </a:p>
+        </p:txBody>
+      </p:sp>
+      <p:sp>
+        <p:nvSpPr>
+          <p:cNvPr id="5" name="Date Placeholder 4"/>
+          <p:cNvSpPr>
+            <a:spLocks noGrp="1"/>
+          </p:cNvSpPr>
+          <p:nvPr>
+            <p:ph type="dt" sz="half" idx="10"/>
+          </p:nvPr>
+        </p:nvSpPr>
+        <p:spPr/>
+        <p:txBody>
+          <a:bodyPr/>
+          <a:lstStyle/>
+          <a:p>
+            <a:fld id="{C764DE79-268F-4C1A-8933-263129D2AF90}" type="datetimeFigureOut">
+              <a:rPr lang="en-US" dirty="0"/>
+              <a:t>7/13/2026</a:t>
+            </a:fld>
+            <a:endParaRPr lang="en-US" dirty="0"/>
+          </a:p>
+        </p:txBody>
+      </p:sp>
+      <p:sp>
+        <p:nvSpPr>
+          <p:cNvPr id="6" name="Footer Placeholder 5"/>
+          <p:cNvSpPr>
+            <a:spLocks noGrp="1"/>
+          </p:cNvSpPr>
+          <p:nvPr>
+            <p:ph type="ftr" sz="quarter" idx="11"/>
+          </p:nvPr>
+        </p:nvSpPr>
+        <p:spPr/>
+        <p:txBody>
+          <a:bodyPr/>
+          <a:lstStyle/>
+          <a:p>
+            <a:endParaRPr lang="en-US" dirty="0"/>
+          </a:p>
+        </p:txBody>
+      </p:sp>
+      <p:sp>
+        <p:nvSpPr>
+          <p:cNvPr id="7" name="Slide Number Placeholder 6"/>
+          <p:cNvSpPr>
+            <a:spLocks noGrp="1"/>
+          </p:cNvSpPr>
+          <p:nvPr>
+            <p:ph type="sldNum" sz="quarter" idx="12"/>
+          </p:nvPr>
+        </p:nvSpPr>
+        <p:spPr/>
+        <p:txBody>
+          <a:bodyPr/>
+          <a:lstStyle/>
+          <a:p>
+            <a:fld id="{48F63A3B-78C7-47BE-AE5E-E10140E04643}" type="slidenum">
+              <a:rPr lang="en-US" dirty="0"/>
+              <a:t>‹#›</a:t>
+            </a:fld>
+            <a:endParaRPr lang="en-US" dirty="0"/>
+          </a:p>
+        </p:txBody>
+      </p:sp>
+    </p:spTree>
+    <p:extLst>
+      <p:ext uri="{BB962C8B-B14F-4D97-AF65-F5344CB8AC3E}">
+        <p14:creationId xmlns:p14="http://schemas.microsoft.com/office/powerpoint/2010/main" val="1421488932"/>
+      </p:ext>
+    </p:extLst>
+  </p:cSld>
+  <p:clrMapOvr>
+    <a:masterClrMapping/>
+  </p:clrMapOvr>
+  <p:hf sldNum="0" hdr="0" ftr="0" dt="0"/>
+</p:sldLayout>
+</file>
+
+<file path=ppt/slideLayouts/slideLayout9.xml><?xml version="1.0" encoding="utf-8"?>
+<p:sldLayout xmlns:a="http://schemas.openxmlformats.org/drawingml/2006/main" xmlns:r="http://schemas.openxmlformats.org/officeDocument/2006/relationships" xmlns:p="http://schemas.openxmlformats.org/presentationml/2006/main" type="picTx" preserve="1">
+  <p:cSld name="Picture with Caption">
+    <p:spTree>
+      <p:nvGrpSpPr>
+        <p:cNvPr id="1" name=""/>
+        <p:cNvGrpSpPr/>
+        <p:nvPr/>
+      </p:nvGrpSpPr>
+      <p:grpSpPr>
+        <a:xfrm>
+          <a:off x="0" y="0"/>
+          <a:ext cx="0" cy="0"/>
+          <a:chOff x="0" y="0"/>
+          <a:chExt cx="0" cy="0"/>
+        </a:xfrm>
+      </p:grpSpPr>
+      <p:sp>
+        <p:nvSpPr>
+          <p:cNvPr id="2" name="Title 1"/>
+          <p:cNvSpPr>
+            <a:spLocks noGrp="1"/>
+          </p:cNvSpPr>
+          <p:nvPr>
+            <p:ph type="title"/>
+          </p:nvPr>
+        </p:nvSpPr>
+        <p:spPr>
+          <a:xfrm>
+            <a:off x="843068" y="528002"/>
+            <a:ext cx="3947598" cy="1848009"/>
+          </a:xfrm>
+        </p:spPr>
+        <p:txBody>
+          <a:bodyPr anchor="b"/>
+          <a:lstStyle>
+            <a:lvl1pPr>
+              <a:defRPr sz="3696"/>
+            </a:lvl1pPr>
+          </a:lstStyle>
+          <a:p>
+            <a:r>
+              <a:rPr lang="en-US"/>
+              <a:t>Click to edit Master title style</a:t>
+            </a:r>
+            <a:endParaRPr lang="en-US" dirty="0"/>
+          </a:p>
+        </p:txBody>
+      </p:sp>
+      <p:sp>
+        <p:nvSpPr>
+          <p:cNvPr id="3" name="Picture Placeholder 2"/>
+          <p:cNvSpPr>
+            <a:spLocks noGrp="1" noChangeAspect="1"/>
+          </p:cNvSpPr>
+          <p:nvPr>
+            <p:ph type="pic" idx="1"/>
+          </p:nvPr>
+        </p:nvSpPr>
+        <p:spPr>
+          <a:xfrm>
+            <a:off x="5203435" y="1140341"/>
+            <a:ext cx="6196310" cy="5628360"/>
+          </a:xfrm>
+        </p:spPr>
+        <p:txBody>
+          <a:bodyPr anchor="t"/>
+          <a:lstStyle>
+            <a:lvl1pPr marL="0" indent="0">
+              <a:buNone/>
+              <a:defRPr sz="3696"/>
+            </a:lvl1pPr>
+            <a:lvl2pPr marL="528020" indent="0">
+              <a:buNone/>
+              <a:defRPr sz="3234"/>
+            </a:lvl2pPr>
+            <a:lvl3pPr marL="1056041" indent="0">
+              <a:buNone/>
+              <a:defRPr sz="2772"/>
+            </a:lvl3pPr>
+            <a:lvl4pPr marL="1584061" indent="0">
+              <a:buNone/>
+              <a:defRPr sz="2310"/>
+            </a:lvl4pPr>
+            <a:lvl5pPr marL="2112081" indent="0">
+              <a:buNone/>
+              <a:defRPr sz="2310"/>
+            </a:lvl5pPr>
+            <a:lvl6pPr marL="2640101" indent="0">
+              <a:buNone/>
+              <a:defRPr sz="2310"/>
+            </a:lvl6pPr>
+            <a:lvl7pPr marL="3168122" indent="0">
+              <a:buNone/>
+              <a:defRPr sz="2310"/>
+            </a:lvl7pPr>
+            <a:lvl8pPr marL="3696142" indent="0">
+              <a:buNone/>
+              <a:defRPr sz="2310"/>
+            </a:lvl8pPr>
+            <a:lvl9pPr marL="4224162" indent="0">
+              <a:buNone/>
+              <a:defRPr sz="2310"/>
+            </a:lvl9pPr>
+          </a:lstStyle>
+          <a:p>
+            <a:r>
+              <a:rPr lang="en-US"/>
+              <a:t>Click icon to add picture</a:t>
+            </a:r>
+            <a:endParaRPr lang="en-US" dirty="0"/>
+          </a:p>
+        </p:txBody>
+      </p:sp>
+      <p:sp>
+        <p:nvSpPr>
+          <p:cNvPr id="4" name="Text Placeholder 3"/>
+          <p:cNvSpPr>
+            <a:spLocks noGrp="1"/>
+          </p:cNvSpPr>
+          <p:nvPr>
+            <p:ph type="body" sz="half" idx="2"/>
+          </p:nvPr>
+        </p:nvSpPr>
+        <p:spPr>
+          <a:xfrm>
+            <a:off x="843068" y="2376011"/>
+            <a:ext cx="3947598" cy="4401855"/>
+          </a:xfrm>
+        </p:spPr>
+        <p:txBody>
+          <a:bodyPr/>
+          <a:lstStyle>
+            <a:lvl1pPr marL="0" indent="0">
+              <a:buNone/>
+              <a:defRPr sz="1848"/>
+            </a:lvl1pPr>
+            <a:lvl2pPr marL="528020" indent="0">
+              <a:buNone/>
+              <a:defRPr sz="1617"/>
+            </a:lvl2pPr>
+            <a:lvl3pPr marL="1056041" indent="0">
+              <a:buNone/>
+              <a:defRPr sz="1386"/>
+            </a:lvl3pPr>
+            <a:lvl4pPr marL="1584061" indent="0">
+              <a:buNone/>
+              <a:defRPr sz="1155"/>
+            </a:lvl4pPr>
+            <a:lvl5pPr marL="2112081" indent="0">
+              <a:buNone/>
+              <a:defRPr sz="1155"/>
+            </a:lvl5pPr>
+            <a:lvl6pPr marL="2640101" indent="0">
+              <a:buNone/>
+              <a:defRPr sz="1155"/>
+            </a:lvl6pPr>
+            <a:lvl7pPr marL="3168122" indent="0">
+              <a:buNone/>
+              <a:defRPr sz="1155"/>
+            </a:lvl7pPr>
+            <a:lvl8pPr marL="3696142" indent="0">
+              <a:buNone/>
+              <a:defRPr sz="1155"/>
+            </a:lvl8pPr>
+            <a:lvl9pPr marL="4224162" indent="0">
+              <a:buNone/>
+              <a:defRPr sz="1155"/>
+            </a:lvl9pPr>
+          </a:lstStyle>
+          <a:p>
+            <a:pPr lvl="0"/>
+            <a:r>
+              <a:rPr lang="en-US"/>
+              <a:t>Click to edit Master text styles</a:t>
+            </a:r>
+          </a:p>
+        </p:txBody>
+      </p:sp>
+      <p:sp>
+        <p:nvSpPr>
+          <p:cNvPr id="5" name="Date Placeholder 4"/>
+          <p:cNvSpPr>
+            <a:spLocks noGrp="1"/>
+          </p:cNvSpPr>
+          <p:nvPr>
+            <p:ph type="dt" sz="half" idx="10"/>
+          </p:nvPr>
+        </p:nvSpPr>
+        <p:spPr/>
+        <p:txBody>
+          <a:bodyPr/>
+          <a:lstStyle/>
+          <a:p>
+            <a:fld id="{C764DE79-268F-4C1A-8933-263129D2AF90}" type="datetimeFigureOut">
+              <a:rPr lang="en-US" dirty="0"/>
+              <a:t>7/13/2026</a:t>
+            </a:fld>
+            <a:endParaRPr lang="en-US" dirty="0"/>
+          </a:p>
+        </p:txBody>
+      </p:sp>
+      <p:sp>
+        <p:nvSpPr>
+          <p:cNvPr id="6" name="Footer Placeholder 5"/>
+          <p:cNvSpPr>
+            <a:spLocks noGrp="1"/>
+          </p:cNvSpPr>
+          <p:nvPr>
+            <p:ph type="ftr" sz="quarter" idx="11"/>
+          </p:nvPr>
+        </p:nvSpPr>
+        <p:spPr/>
+        <p:txBody>
+          <a:bodyPr/>
+          <a:lstStyle/>
+          <a:p>
+            <a:endParaRPr lang="en-US" dirty="0"/>
+          </a:p>
+        </p:txBody>
+      </p:sp>
+      <p:sp>
+        <p:nvSpPr>
+          <p:cNvPr id="7" name="Slide Number Placeholder 6"/>
+          <p:cNvSpPr>
+            <a:spLocks noGrp="1"/>
+          </p:cNvSpPr>
+          <p:nvPr>
+            <p:ph type="sldNum" sz="quarter" idx="12"/>
+          </p:nvPr>
+        </p:nvSpPr>
+        <p:spPr/>
+        <p:txBody>
+          <a:bodyPr/>
+          <a:lstStyle/>
+          <a:p>
+            <a:fld id="{48F63A3B-78C7-47BE-AE5E-E10140E04643}" type="slidenum">
+              <a:rPr lang="en-US" dirty="0"/>
+              <a:t>‹#›</a:t>
+            </a:fld>
+            <a:endParaRPr lang="en-US" dirty="0"/>
+          </a:p>
+        </p:txBody>
+      </p:sp>
+    </p:spTree>
+    <p:extLst>
+      <p:ext uri="{BB962C8B-B14F-4D97-AF65-F5344CB8AC3E}">
+        <p14:creationId xmlns:p14="http://schemas.microsoft.com/office/powerpoint/2010/main" val="3607037043"/>
+      </p:ext>
+    </p:extLst>
+  </p:cSld>
+  <p:clrMapOvr>
+    <a:masterClrMapping/>
+  </p:clrMapOvr>
+  <p:hf sldNum="0" hdr="0" ftr="0" dt="0"/>
 </p:sldLayout>
 </file>
 
@@ -667,27 +2963,254 @@
           <a:chExt cx="0" cy="0"/>
         </a:xfrm>
       </p:grpSpPr>
+      <p:sp>
+        <p:nvSpPr>
+          <p:cNvPr id="2" name="Title Placeholder 1"/>
+          <p:cNvSpPr>
+            <a:spLocks noGrp="1"/>
+          </p:cNvSpPr>
+          <p:nvPr>
+            <p:ph type="title"/>
+          </p:nvPr>
+        </p:nvSpPr>
+        <p:spPr>
+          <a:xfrm>
+            <a:off x="841474" y="421671"/>
+            <a:ext cx="10556677" cy="1530841"/>
+          </a:xfrm>
+          <a:prstGeom prst="rect">
+            <a:avLst/>
+          </a:prstGeom>
+        </p:spPr>
+        <p:txBody>
+          <a:bodyPr vert="horz" lIns="91440" tIns="45720" rIns="91440" bIns="45720" rtlCol="0" anchor="ctr">
+            <a:normAutofit/>
+          </a:bodyPr>
+          <a:lstStyle/>
+          <a:p>
+            <a:r>
+              <a:rPr lang="en-US"/>
+              <a:t>Click to edit Master title style</a:t>
+            </a:r>
+            <a:endParaRPr lang="en-US" dirty="0"/>
+          </a:p>
+        </p:txBody>
+      </p:sp>
+      <p:sp>
+        <p:nvSpPr>
+          <p:cNvPr id="3" name="Text Placeholder 2"/>
+          <p:cNvSpPr>
+            <a:spLocks noGrp="1"/>
+          </p:cNvSpPr>
+          <p:nvPr>
+            <p:ph type="body" idx="1"/>
+          </p:nvPr>
+        </p:nvSpPr>
+        <p:spPr>
+          <a:xfrm>
+            <a:off x="841474" y="2108344"/>
+            <a:ext cx="10556677" cy="5025191"/>
+          </a:xfrm>
+          <a:prstGeom prst="rect">
+            <a:avLst/>
+          </a:prstGeom>
+        </p:spPr>
+        <p:txBody>
+          <a:bodyPr vert="horz" lIns="91440" tIns="45720" rIns="91440" bIns="45720" rtlCol="0">
+            <a:normAutofit/>
+          </a:bodyPr>
+          <a:lstStyle/>
+          <a:p>
+            <a:pPr lvl="0"/>
+            <a:r>
+              <a:rPr lang="en-US"/>
+              <a:t>Click to edit Master text styles</a:t>
+            </a:r>
+          </a:p>
+          <a:p>
+            <a:pPr lvl="1"/>
+            <a:r>
+              <a:rPr lang="en-US"/>
+              <a:t>Second level</a:t>
+            </a:r>
+          </a:p>
+          <a:p>
+            <a:pPr lvl="2"/>
+            <a:r>
+              <a:rPr lang="en-US"/>
+              <a:t>Third level</a:t>
+            </a:r>
+          </a:p>
+          <a:p>
+            <a:pPr lvl="3"/>
+            <a:r>
+              <a:rPr lang="en-US"/>
+              <a:t>Fourth level</a:t>
+            </a:r>
+          </a:p>
+          <a:p>
+            <a:pPr lvl="4"/>
+            <a:r>
+              <a:rPr lang="en-US"/>
+              <a:t>Fifth level</a:t>
+            </a:r>
+            <a:endParaRPr lang="en-US" dirty="0"/>
+          </a:p>
+        </p:txBody>
+      </p:sp>
+      <p:sp>
+        <p:nvSpPr>
+          <p:cNvPr id="4" name="Date Placeholder 3"/>
+          <p:cNvSpPr>
+            <a:spLocks noGrp="1"/>
+          </p:cNvSpPr>
+          <p:nvPr>
+            <p:ph type="dt" sz="half" idx="2"/>
+          </p:nvPr>
+        </p:nvSpPr>
+        <p:spPr>
+          <a:xfrm>
+            <a:off x="841474" y="7340703"/>
+            <a:ext cx="2753916" cy="421669"/>
+          </a:xfrm>
+          <a:prstGeom prst="rect">
+            <a:avLst/>
+          </a:prstGeom>
+        </p:spPr>
+        <p:txBody>
+          <a:bodyPr vert="horz" lIns="91440" tIns="45720" rIns="91440" bIns="45720" rtlCol="0" anchor="ctr"/>
+          <a:lstStyle>
+            <a:lvl1pPr algn="l">
+              <a:defRPr sz="1386">
+                <a:solidFill>
+                  <a:schemeClr val="tx1">
+                    <a:tint val="75000"/>
+                  </a:schemeClr>
+                </a:solidFill>
+              </a:defRPr>
+            </a:lvl1pPr>
+          </a:lstStyle>
+          <a:p>
+            <a:fld id="{C764DE79-268F-4C1A-8933-263129D2AF90}" type="datetimeFigureOut">
+              <a:rPr lang="en-US" dirty="0"/>
+              <a:t>7/13/2026</a:t>
+            </a:fld>
+            <a:endParaRPr lang="en-US" dirty="0"/>
+          </a:p>
+        </p:txBody>
+      </p:sp>
+      <p:sp>
+        <p:nvSpPr>
+          <p:cNvPr id="5" name="Footer Placeholder 4"/>
+          <p:cNvSpPr>
+            <a:spLocks noGrp="1"/>
+          </p:cNvSpPr>
+          <p:nvPr>
+            <p:ph type="ftr" sz="quarter" idx="3"/>
+          </p:nvPr>
+        </p:nvSpPr>
+        <p:spPr>
+          <a:xfrm>
+            <a:off x="4054376" y="7340703"/>
+            <a:ext cx="4130873" cy="421669"/>
+          </a:xfrm>
+          <a:prstGeom prst="rect">
+            <a:avLst/>
+          </a:prstGeom>
+        </p:spPr>
+        <p:txBody>
+          <a:bodyPr vert="horz" lIns="91440" tIns="45720" rIns="91440" bIns="45720" rtlCol="0" anchor="ctr"/>
+          <a:lstStyle>
+            <a:lvl1pPr algn="ctr">
+              <a:defRPr sz="1386">
+                <a:solidFill>
+                  <a:schemeClr val="tx1">
+                    <a:tint val="75000"/>
+                  </a:schemeClr>
+                </a:solidFill>
+              </a:defRPr>
+            </a:lvl1pPr>
+          </a:lstStyle>
+          <a:p>
+            <a:endParaRPr lang="en-US" dirty="0"/>
+          </a:p>
+        </p:txBody>
+      </p:sp>
+      <p:sp>
+        <p:nvSpPr>
+          <p:cNvPr id="6" name="Slide Number Placeholder 5"/>
+          <p:cNvSpPr>
+            <a:spLocks noGrp="1"/>
+          </p:cNvSpPr>
+          <p:nvPr>
+            <p:ph type="sldNum" sz="quarter" idx="4"/>
+          </p:nvPr>
+        </p:nvSpPr>
+        <p:spPr>
+          <a:xfrm>
+            <a:off x="8644235" y="7340703"/>
+            <a:ext cx="2753916" cy="421669"/>
+          </a:xfrm>
+          <a:prstGeom prst="rect">
+            <a:avLst/>
+          </a:prstGeom>
+        </p:spPr>
+        <p:txBody>
+          <a:bodyPr vert="horz" lIns="91440" tIns="45720" rIns="91440" bIns="45720" rtlCol="0" anchor="ctr"/>
+          <a:lstStyle>
+            <a:lvl1pPr algn="r">
+              <a:defRPr sz="1386">
+                <a:solidFill>
+                  <a:schemeClr val="tx1">
+                    <a:tint val="75000"/>
+                  </a:schemeClr>
+                </a:solidFill>
+              </a:defRPr>
+            </a:lvl1pPr>
+          </a:lstStyle>
+          <a:p>
+            <a:fld id="{48F63A3B-78C7-47BE-AE5E-E10140E04643}" type="slidenum">
+              <a:rPr lang="en-US" dirty="0"/>
+              <a:t>‹#›</a:t>
+            </a:fld>
+            <a:endParaRPr lang="en-US" dirty="0"/>
+          </a:p>
+        </p:txBody>
+      </p:sp>
     </p:spTree>
     <p:extLst>
       <p:ext uri="{BB962C8B-B14F-4D97-AF65-F5344CB8AC3E}">
-        <p14:creationId xmlns:p14="http://schemas.microsoft.com/office/powerpoint/2010/main" val="2433663754"/>
+        <p14:creationId xmlns:p14="http://schemas.microsoft.com/office/powerpoint/2010/main" val="1448834279"/>
       </p:ext>
     </p:extLst>
   </p:cSld>
   <p:clrMap bg1="lt1" tx1="dk1" bg2="lt2" tx2="dk2" accent1="accent1" accent2="accent2" accent3="accent3" accent4="accent4" accent5="accent5" accent6="accent6" hlink="hlink" folHlink="folHlink"/>
   <p:sldLayoutIdLst>
-    <p:sldLayoutId id="2147483649" r:id="rId1"/>
-    <p:sldLayoutId id="2147483650" r:id="rId2"/>
+    <p:sldLayoutId id="2147483652" r:id="rId1"/>
+    <p:sldLayoutId id="2147483653" r:id="rId2"/>
+    <p:sldLayoutId id="2147483654" r:id="rId3"/>
+    <p:sldLayoutId id="2147483655" r:id="rId4"/>
+    <p:sldLayoutId id="2147483656" r:id="rId5"/>
+    <p:sldLayoutId id="2147483657" r:id="rId6"/>
+    <p:sldLayoutId id="2147483658" r:id="rId7"/>
+    <p:sldLayoutId id="2147483659" r:id="rId8"/>
+    <p:sldLayoutId id="2147483660" r:id="rId9"/>
+    <p:sldLayoutId id="2147483661" r:id="rId10"/>
+    <p:sldLayoutId id="2147483662" r:id="rId11"/>
+    <p:sldLayoutId id="2147483663" r:id="rId12"/>
   </p:sldLayoutIdLst>
   <p:hf sldNum="0" hdr="0" ftr="0" dt="0"/>
   <p:txStyles>
     <p:titleStyle>
-      <a:lvl1pPr algn="ctr" defTabSz="914400" rtl="0" eaLnBrk="1" latinLnBrk="0" hangingPunct="1">
+      <a:lvl1pPr algn="l" defTabSz="1056041" rtl="0" eaLnBrk="1" latinLnBrk="0" hangingPunct="1">
+        <a:lnSpc>
+          <a:spcPct val="90000"/>
+        </a:lnSpc>
         <a:spcBef>
           <a:spcPct val="0"/>
         </a:spcBef>
         <a:buNone/>
-        <a:defRPr sz="4400" kern="1200">
+        <a:defRPr sz="5082" kern="1200">
           <a:solidFill>
             <a:schemeClr val="tx1"/>
           </a:solidFill>
@@ -698,13 +3221,16 @@
       </a:lvl1pPr>
     </p:titleStyle>
     <p:bodyStyle>
-      <a:lvl1pPr marL="342900" indent="-342900" algn="l" defTabSz="914400" rtl="0" eaLnBrk="1" latinLnBrk="0" hangingPunct="1">
+      <a:lvl1pPr marL="264010" indent="-264010" algn="l" defTabSz="1056041" rtl="0" eaLnBrk="1" latinLnBrk="0" hangingPunct="1">
+        <a:lnSpc>
+          <a:spcPct val="90000"/>
+        </a:lnSpc>
         <a:spcBef>
-          <a:spcPct val="20000"/>
+          <a:spcPts val="1155"/>
         </a:spcBef>
-        <a:buFont typeface="Arial" pitchFamily="34" charset="0"/>
+        <a:buFont typeface="Arial" panose="020B0604020202020204" pitchFamily="34" charset="0"/>
         <a:buChar char="•"/>
-        <a:defRPr sz="3200" kern="1200">
+        <a:defRPr sz="3234" kern="1200">
           <a:solidFill>
             <a:schemeClr val="tx1"/>
           </a:solidFill>
@@ -713,13 +3239,16 @@
           <a:cs typeface="+mn-cs"/>
         </a:defRPr>
       </a:lvl1pPr>
-      <a:lvl2pPr marL="742950" indent="-285750" algn="l" defTabSz="914400" rtl="0" eaLnBrk="1" latinLnBrk="0" hangingPunct="1">
+      <a:lvl2pPr marL="792030" indent="-264010" algn="l" defTabSz="1056041" rtl="0" eaLnBrk="1" latinLnBrk="0" hangingPunct="1">
+        <a:lnSpc>
+          <a:spcPct val="90000"/>
+        </a:lnSpc>
         <a:spcBef>
-          <a:spcPct val="20000"/>
+          <a:spcPts val="577"/>
         </a:spcBef>
-        <a:buFont typeface="Arial" pitchFamily="34" charset="0"/>
-        <a:buChar char="–"/>
-        <a:defRPr sz="2800" kern="1200">
+        <a:buFont typeface="Arial" panose="020B0604020202020204" pitchFamily="34" charset="0"/>
+        <a:buChar char="•"/>
+        <a:defRPr sz="2772" kern="1200">
           <a:solidFill>
             <a:schemeClr val="tx1"/>
           </a:solidFill>
@@ -728,13 +3257,16 @@
           <a:cs typeface="+mn-cs"/>
         </a:defRPr>
       </a:lvl2pPr>
-      <a:lvl3pPr marL="1143000" indent="-228600" algn="l" defTabSz="914400" rtl="0" eaLnBrk="1" latinLnBrk="0" hangingPunct="1">
+      <a:lvl3pPr marL="1320051" indent="-264010" algn="l" defTabSz="1056041" rtl="0" eaLnBrk="1" latinLnBrk="0" hangingPunct="1">
+        <a:lnSpc>
+          <a:spcPct val="90000"/>
+        </a:lnSpc>
         <a:spcBef>
-          <a:spcPct val="20000"/>
+          <a:spcPts val="577"/>
         </a:spcBef>
-        <a:buFont typeface="Arial" pitchFamily="34" charset="0"/>
+        <a:buFont typeface="Arial" panose="020B0604020202020204" pitchFamily="34" charset="0"/>
         <a:buChar char="•"/>
-        <a:defRPr sz="2400" kern="1200">
+        <a:defRPr sz="2310" kern="1200">
           <a:solidFill>
             <a:schemeClr val="tx1"/>
           </a:solidFill>
@@ -743,13 +3275,16 @@
           <a:cs typeface="+mn-cs"/>
         </a:defRPr>
       </a:lvl3pPr>
-      <a:lvl4pPr marL="1600200" indent="-228600" algn="l" defTabSz="914400" rtl="0" eaLnBrk="1" latinLnBrk="0" hangingPunct="1">
+      <a:lvl4pPr marL="1848071" indent="-264010" algn="l" defTabSz="1056041" rtl="0" eaLnBrk="1" latinLnBrk="0" hangingPunct="1">
+        <a:lnSpc>
+          <a:spcPct val="90000"/>
+        </a:lnSpc>
         <a:spcBef>
-          <a:spcPct val="20000"/>
+          <a:spcPts val="577"/>
         </a:spcBef>
-        <a:buFont typeface="Arial" pitchFamily="34" charset="0"/>
-        <a:buChar char="–"/>
-        <a:defRPr sz="2000" kern="1200">
+        <a:buFont typeface="Arial" panose="020B0604020202020204" pitchFamily="34" charset="0"/>
+        <a:buChar char="•"/>
+        <a:defRPr sz="2079" kern="1200">
           <a:solidFill>
             <a:schemeClr val="tx1"/>
           </a:solidFill>
@@ -758,13 +3293,16 @@
           <a:cs typeface="+mn-cs"/>
         </a:defRPr>
       </a:lvl4pPr>
-      <a:lvl5pPr marL="2057400" indent="-228600" algn="l" defTabSz="914400" rtl="0" eaLnBrk="1" latinLnBrk="0" hangingPunct="1">
+      <a:lvl5pPr marL="2376091" indent="-264010" algn="l" defTabSz="1056041" rtl="0" eaLnBrk="1" latinLnBrk="0" hangingPunct="1">
+        <a:lnSpc>
+          <a:spcPct val="90000"/>
+        </a:lnSpc>
         <a:spcBef>
-          <a:spcPct val="20000"/>
+          <a:spcPts val="577"/>
         </a:spcBef>
-        <a:buFont typeface="Arial" pitchFamily="34" charset="0"/>
-        <a:buChar char="»"/>
-        <a:defRPr sz="2000" kern="1200">
+        <a:buFont typeface="Arial" panose="020B0604020202020204" pitchFamily="34" charset="0"/>
+        <a:buChar char="•"/>
+        <a:defRPr sz="2079" kern="1200">
           <a:solidFill>
             <a:schemeClr val="tx1"/>
           </a:solidFill>
@@ -773,13 +3311,16 @@
           <a:cs typeface="+mn-cs"/>
         </a:defRPr>
       </a:lvl5pPr>
-      <a:lvl6pPr marL="2514600" indent="-228600" algn="l" defTabSz="914400" rtl="0" eaLnBrk="1" latinLnBrk="0" hangingPunct="1">
+      <a:lvl6pPr marL="2904112" indent="-264010" algn="l" defTabSz="1056041" rtl="0" eaLnBrk="1" latinLnBrk="0" hangingPunct="1">
+        <a:lnSpc>
+          <a:spcPct val="90000"/>
+        </a:lnSpc>
         <a:spcBef>
-          <a:spcPct val="20000"/>
+          <a:spcPts val="577"/>
         </a:spcBef>
-        <a:buFont typeface="Arial" pitchFamily="34" charset="0"/>
+        <a:buFont typeface="Arial" panose="020B0604020202020204" pitchFamily="34" charset="0"/>
         <a:buChar char="•"/>
-        <a:defRPr sz="2000" kern="1200">
+        <a:defRPr sz="2079" kern="1200">
           <a:solidFill>
             <a:schemeClr val="tx1"/>
           </a:solidFill>
@@ -788,13 +3329,16 @@
           <a:cs typeface="+mn-cs"/>
         </a:defRPr>
       </a:lvl6pPr>
-      <a:lvl7pPr marL="2971800" indent="-228600" algn="l" defTabSz="914400" rtl="0" eaLnBrk="1" latinLnBrk="0" hangingPunct="1">
+      <a:lvl7pPr marL="3432132" indent="-264010" algn="l" defTabSz="1056041" rtl="0" eaLnBrk="1" latinLnBrk="0" hangingPunct="1">
+        <a:lnSpc>
+          <a:spcPct val="90000"/>
+        </a:lnSpc>
         <a:spcBef>
-          <a:spcPct val="20000"/>
+          <a:spcPts val="577"/>
         </a:spcBef>
-        <a:buFont typeface="Arial" pitchFamily="34" charset="0"/>
+        <a:buFont typeface="Arial" panose="020B0604020202020204" pitchFamily="34" charset="0"/>
         <a:buChar char="•"/>
-        <a:defRPr sz="2000" kern="1200">
+        <a:defRPr sz="2079" kern="1200">
           <a:solidFill>
             <a:schemeClr val="tx1"/>
           </a:solidFill>
@@ -803,13 +3347,16 @@
           <a:cs typeface="+mn-cs"/>
         </a:defRPr>
       </a:lvl7pPr>
-      <a:lvl8pPr marL="3429000" indent="-228600" algn="l" defTabSz="914400" rtl="0" eaLnBrk="1" latinLnBrk="0" hangingPunct="1">
+      <a:lvl8pPr marL="3960152" indent="-264010" algn="l" defTabSz="1056041" rtl="0" eaLnBrk="1" latinLnBrk="0" hangingPunct="1">
+        <a:lnSpc>
+          <a:spcPct val="90000"/>
+        </a:lnSpc>
         <a:spcBef>
-          <a:spcPct val="20000"/>
+          <a:spcPts val="577"/>
         </a:spcBef>
-        <a:buFont typeface="Arial" pitchFamily="34" charset="0"/>
+        <a:buFont typeface="Arial" panose="020B0604020202020204" pitchFamily="34" charset="0"/>
         <a:buChar char="•"/>
-        <a:defRPr sz="2000" kern="1200">
+        <a:defRPr sz="2079" kern="1200">
           <a:solidFill>
             <a:schemeClr val="tx1"/>
           </a:solidFill>
@@ -818,13 +3365,16 @@
           <a:cs typeface="+mn-cs"/>
         </a:defRPr>
       </a:lvl8pPr>
-      <a:lvl9pPr marL="3886200" indent="-228600" algn="l" defTabSz="914400" rtl="0" eaLnBrk="1" latinLnBrk="0" hangingPunct="1">
+      <a:lvl9pPr marL="4488172" indent="-264010" algn="l" defTabSz="1056041" rtl="0" eaLnBrk="1" latinLnBrk="0" hangingPunct="1">
+        <a:lnSpc>
+          <a:spcPct val="90000"/>
+        </a:lnSpc>
         <a:spcBef>
-          <a:spcPct val="20000"/>
+          <a:spcPts val="577"/>
         </a:spcBef>
-        <a:buFont typeface="Arial" pitchFamily="34" charset="0"/>
+        <a:buFont typeface="Arial" panose="020B0604020202020204" pitchFamily="34" charset="0"/>
         <a:buChar char="•"/>
-        <a:defRPr sz="2000" kern="1200">
+        <a:defRPr sz="2079" kern="1200">
           <a:solidFill>
             <a:schemeClr val="tx1"/>
           </a:solidFill>
@@ -838,8 +3388,8 @@
       <a:defPPr>
         <a:defRPr lang="en-US"/>
       </a:defPPr>
-      <a:lvl1pPr marL="0" algn="l" defTabSz="914400" rtl="0" eaLnBrk="1" latinLnBrk="0" hangingPunct="1">
-        <a:defRPr sz="1800" kern="1200">
+      <a:lvl1pPr marL="0" algn="l" defTabSz="1056041" rtl="0" eaLnBrk="1" latinLnBrk="0" hangingPunct="1">
+        <a:defRPr sz="2079" kern="1200">
           <a:solidFill>
             <a:schemeClr val="tx1"/>
           </a:solidFill>
@@ -848,8 +3398,8 @@
           <a:cs typeface="+mn-cs"/>
         </a:defRPr>
       </a:lvl1pPr>
-      <a:lvl2pPr marL="457200" algn="l" defTabSz="914400" rtl="0" eaLnBrk="1" latinLnBrk="0" hangingPunct="1">
-        <a:defRPr sz="1800" kern="1200">
+      <a:lvl2pPr marL="528020" algn="l" defTabSz="1056041" rtl="0" eaLnBrk="1" latinLnBrk="0" hangingPunct="1">
+        <a:defRPr sz="2079" kern="1200">
           <a:solidFill>
             <a:schemeClr val="tx1"/>
           </a:solidFill>
@@ -858,8 +3408,8 @@
           <a:cs typeface="+mn-cs"/>
         </a:defRPr>
       </a:lvl2pPr>
-      <a:lvl3pPr marL="914400" algn="l" defTabSz="914400" rtl="0" eaLnBrk="1" latinLnBrk="0" hangingPunct="1">
-        <a:defRPr sz="1800" kern="1200">
+      <a:lvl3pPr marL="1056041" algn="l" defTabSz="1056041" rtl="0" eaLnBrk="1" latinLnBrk="0" hangingPunct="1">
+        <a:defRPr sz="2079" kern="1200">
           <a:solidFill>
             <a:schemeClr val="tx1"/>
           </a:solidFill>
@@ -868,8 +3418,8 @@
           <a:cs typeface="+mn-cs"/>
         </a:defRPr>
       </a:lvl3pPr>
-      <a:lvl4pPr marL="1371600" algn="l" defTabSz="914400" rtl="0" eaLnBrk="1" latinLnBrk="0" hangingPunct="1">
-        <a:defRPr sz="1800" kern="1200">
+      <a:lvl4pPr marL="1584061" algn="l" defTabSz="1056041" rtl="0" eaLnBrk="1" latinLnBrk="0" hangingPunct="1">
+        <a:defRPr sz="2079" kern="1200">
           <a:solidFill>
             <a:schemeClr val="tx1"/>
           </a:solidFill>
@@ -878,8 +3428,8 @@
           <a:cs typeface="+mn-cs"/>
         </a:defRPr>
       </a:lvl4pPr>
-      <a:lvl5pPr marL="1828800" algn="l" defTabSz="914400" rtl="0" eaLnBrk="1" latinLnBrk="0" hangingPunct="1">
-        <a:defRPr sz="1800" kern="1200">
+      <a:lvl5pPr marL="2112081" algn="l" defTabSz="1056041" rtl="0" eaLnBrk="1" latinLnBrk="0" hangingPunct="1">
+        <a:defRPr sz="2079" kern="1200">
           <a:solidFill>
             <a:schemeClr val="tx1"/>
           </a:solidFill>
@@ -888,8 +3438,8 @@
           <a:cs typeface="+mn-cs"/>
         </a:defRPr>
       </a:lvl5pPr>
-      <a:lvl6pPr marL="2286000" algn="l" defTabSz="914400" rtl="0" eaLnBrk="1" latinLnBrk="0" hangingPunct="1">
-        <a:defRPr sz="1800" kern="1200">
+      <a:lvl6pPr marL="2640101" algn="l" defTabSz="1056041" rtl="0" eaLnBrk="1" latinLnBrk="0" hangingPunct="1">
+        <a:defRPr sz="2079" kern="1200">
           <a:solidFill>
             <a:schemeClr val="tx1"/>
           </a:solidFill>
@@ -898,8 +3448,8 @@
           <a:cs typeface="+mn-cs"/>
         </a:defRPr>
       </a:lvl6pPr>
-      <a:lvl7pPr marL="2743200" algn="l" defTabSz="914400" rtl="0" eaLnBrk="1" latinLnBrk="0" hangingPunct="1">
-        <a:defRPr sz="1800" kern="1200">
+      <a:lvl7pPr marL="3168122" algn="l" defTabSz="1056041" rtl="0" eaLnBrk="1" latinLnBrk="0" hangingPunct="1">
+        <a:defRPr sz="2079" kern="1200">
           <a:solidFill>
             <a:schemeClr val="tx1"/>
           </a:solidFill>
@@ -908,8 +3458,8 @@
           <a:cs typeface="+mn-cs"/>
         </a:defRPr>
       </a:lvl7pPr>
-      <a:lvl8pPr marL="3200400" algn="l" defTabSz="914400" rtl="0" eaLnBrk="1" latinLnBrk="0" hangingPunct="1">
-        <a:defRPr sz="1800" kern="1200">
+      <a:lvl8pPr marL="3696142" algn="l" defTabSz="1056041" rtl="0" eaLnBrk="1" latinLnBrk="0" hangingPunct="1">
+        <a:defRPr sz="2079" kern="1200">
           <a:solidFill>
             <a:schemeClr val="tx1"/>
           </a:solidFill>
@@ -918,8 +3468,8 @@
           <a:cs typeface="+mn-cs"/>
         </a:defRPr>
       </a:lvl8pPr>
-      <a:lvl9pPr marL="3657600" algn="l" defTabSz="914400" rtl="0" eaLnBrk="1" latinLnBrk="0" hangingPunct="1">
-        <a:defRPr sz="1800" kern="1200">
+      <a:lvl9pPr marL="4224162" algn="l" defTabSz="1056041" rtl="0" eaLnBrk="1" latinLnBrk="0" hangingPunct="1">
+        <a:defRPr sz="2079" kern="1200">
           <a:solidFill>
             <a:schemeClr val="tx1"/>
           </a:solidFill>
@@ -991,8 +3541,8 @@
         </p:blipFill>
         <p:spPr>
           <a:xfrm>
-            <a:off x="-20556" y="0"/>
-            <a:ext cx="3200400" cy="1828800"/>
+            <a:off x="-4456" y="0"/>
+            <a:ext cx="13855677" cy="7917529"/>
           </a:xfrm>
           <a:prstGeom prst="rect">
             <a:avLst/>
@@ -1002,1005 +3552,6 @@
           </a:solidFill>
         </p:spPr>
       </p:pic>
-      <p:sp>
-        <p:nvSpPr>
-          <p:cNvPr id="50" name="slant stripe 1">
-            <a:extLst>
-              <a:ext uri="{FF2B5EF4-FFF2-40B4-BE49-F238E27FC236}">
-                <a16:creationId xmlns:a16="http://schemas.microsoft.com/office/drawing/2014/main" id="{3BB4B8DB-F49F-EA6A-FFE8-FB7449286137}"/>
-              </a:ext>
-              <a:ext uri="{C183D7F6-B498-43B3-948B-1728B52AA6E4}">
-                <adec:decorative xmlns:adec="http://schemas.microsoft.com/office/drawing/2017/decorative" val="1"/>
-              </a:ext>
-            </a:extLst>
-          </p:cNvPr>
-          <p:cNvSpPr/>
-          <p:nvPr/>
-        </p:nvSpPr>
-        <p:spPr>
-          <a:xfrm rot="20160000">
-            <a:off x="-46144" y="-1089102"/>
-            <a:ext cx="116067" cy="3108960"/>
-          </a:xfrm>
-          <a:prstGeom prst="rect">
-            <a:avLst/>
-          </a:prstGeom>
-          <a:gradFill>
-            <a:gsLst>
-              <a:gs pos="0">
-                <a:schemeClr val="accent1">
-                  <a:lumMod val="5000"/>
-                  <a:lumOff val="95000"/>
-                </a:schemeClr>
-              </a:gs>
-              <a:gs pos="31000">
-                <a:srgbClr val="ABC0E4">
-                  <a:alpha val="30196"/>
-                </a:srgbClr>
-              </a:gs>
-              <a:gs pos="100000">
-                <a:srgbClr val="C7D5ED">
-                  <a:alpha val="0"/>
-                </a:srgbClr>
-              </a:gs>
-            </a:gsLst>
-            <a:lin ang="5400000" scaled="1"/>
-          </a:gradFill>
-          <a:ln/>
-          <a:effectLst>
-            <a:softEdge rad="25400"/>
-          </a:effectLst>
-        </p:spPr>
-        <p:txBody>
-          <a:bodyPr/>
-          <a:lstStyle/>
-          <a:p>
-            <a:endParaRPr lang="en-GB"/>
-          </a:p>
-        </p:txBody>
-      </p:sp>
-      <p:sp>
-        <p:nvSpPr>
-          <p:cNvPr id="52" name="slant stripe 2">
-            <a:extLst>
-              <a:ext uri="{FF2B5EF4-FFF2-40B4-BE49-F238E27FC236}">
-                <a16:creationId xmlns:a16="http://schemas.microsoft.com/office/drawing/2014/main" id="{5A6DAD97-16AB-AF43-70B8-93661AB94F65}"/>
-              </a:ext>
-              <a:ext uri="{C183D7F6-B498-43B3-948B-1728B52AA6E4}">
-                <adec:decorative xmlns:adec="http://schemas.microsoft.com/office/drawing/2017/decorative" val="1"/>
-              </a:ext>
-            </a:extLst>
-          </p:cNvPr>
-          <p:cNvSpPr/>
-          <p:nvPr/>
-        </p:nvSpPr>
-        <p:spPr>
-          <a:xfrm rot="20160000">
-            <a:off x="273033" y="-1089102"/>
-            <a:ext cx="116067" cy="3108960"/>
-          </a:xfrm>
-          <a:prstGeom prst="rect">
-            <a:avLst/>
-          </a:prstGeom>
-          <a:gradFill>
-            <a:gsLst>
-              <a:gs pos="0">
-                <a:schemeClr val="accent1">
-                  <a:lumMod val="5000"/>
-                  <a:lumOff val="95000"/>
-                </a:schemeClr>
-              </a:gs>
-              <a:gs pos="31000">
-                <a:srgbClr val="ABC0E4">
-                  <a:alpha val="30196"/>
-                </a:srgbClr>
-              </a:gs>
-              <a:gs pos="100000">
-                <a:srgbClr val="C7D5ED">
-                  <a:alpha val="0"/>
-                </a:srgbClr>
-              </a:gs>
-            </a:gsLst>
-            <a:lin ang="5400000" scaled="1"/>
-          </a:gradFill>
-          <a:ln/>
-          <a:effectLst>
-            <a:softEdge rad="25400"/>
-          </a:effectLst>
-        </p:spPr>
-        <p:txBody>
-          <a:bodyPr/>
-          <a:lstStyle/>
-          <a:p>
-            <a:endParaRPr lang="en-GB"/>
-          </a:p>
-        </p:txBody>
-      </p:sp>
-      <p:sp>
-        <p:nvSpPr>
-          <p:cNvPr id="54" name="slant stripe 3">
-            <a:extLst>
-              <a:ext uri="{FF2B5EF4-FFF2-40B4-BE49-F238E27FC236}">
-                <a16:creationId xmlns:a16="http://schemas.microsoft.com/office/drawing/2014/main" id="{42AEFB02-DCD9-D537-5E9B-C8AAB48CBABF}"/>
-              </a:ext>
-              <a:ext uri="{C183D7F6-B498-43B3-948B-1728B52AA6E4}">
-                <adec:decorative xmlns:adec="http://schemas.microsoft.com/office/drawing/2017/decorative" val="1"/>
-              </a:ext>
-            </a:extLst>
-          </p:cNvPr>
-          <p:cNvSpPr/>
-          <p:nvPr/>
-        </p:nvSpPr>
-        <p:spPr>
-          <a:xfrm rot="20160000">
-            <a:off x="827725" y="-1089102"/>
-            <a:ext cx="116067" cy="3108960"/>
-          </a:xfrm>
-          <a:prstGeom prst="rect">
-            <a:avLst/>
-          </a:prstGeom>
-          <a:gradFill>
-            <a:gsLst>
-              <a:gs pos="0">
-                <a:schemeClr val="accent1">
-                  <a:lumMod val="5000"/>
-                  <a:lumOff val="95000"/>
-                </a:schemeClr>
-              </a:gs>
-              <a:gs pos="31000">
-                <a:srgbClr val="ABC0E4">
-                  <a:alpha val="30196"/>
-                </a:srgbClr>
-              </a:gs>
-              <a:gs pos="100000">
-                <a:srgbClr val="C7D5ED">
-                  <a:alpha val="0"/>
-                </a:srgbClr>
-              </a:gs>
-            </a:gsLst>
-            <a:lin ang="5400000" scaled="1"/>
-          </a:gradFill>
-          <a:ln/>
-          <a:effectLst>
-            <a:softEdge rad="25400"/>
-          </a:effectLst>
-        </p:spPr>
-        <p:txBody>
-          <a:bodyPr/>
-          <a:lstStyle/>
-          <a:p>
-            <a:endParaRPr lang="en-GB"/>
-          </a:p>
-        </p:txBody>
-      </p:sp>
-      <p:sp>
-        <p:nvSpPr>
-          <p:cNvPr id="56" name="slant stripe 4">
-            <a:extLst>
-              <a:ext uri="{FF2B5EF4-FFF2-40B4-BE49-F238E27FC236}">
-                <a16:creationId xmlns:a16="http://schemas.microsoft.com/office/drawing/2014/main" id="{77666F7D-2CE5-0D19-F484-ECE0A347E79E}"/>
-              </a:ext>
-              <a:ext uri="{C183D7F6-B498-43B3-948B-1728B52AA6E4}">
-                <adec:decorative xmlns:adec="http://schemas.microsoft.com/office/drawing/2017/decorative" val="1"/>
-              </a:ext>
-            </a:extLst>
-          </p:cNvPr>
-          <p:cNvSpPr/>
-          <p:nvPr/>
-        </p:nvSpPr>
-        <p:spPr>
-          <a:xfrm rot="20160000">
-            <a:off x="1092629" y="-1089101"/>
-            <a:ext cx="116067" cy="3108960"/>
-          </a:xfrm>
-          <a:prstGeom prst="rect">
-            <a:avLst/>
-          </a:prstGeom>
-          <a:gradFill>
-            <a:gsLst>
-              <a:gs pos="0">
-                <a:schemeClr val="accent1">
-                  <a:lumMod val="5000"/>
-                  <a:lumOff val="95000"/>
-                </a:schemeClr>
-              </a:gs>
-              <a:gs pos="31000">
-                <a:srgbClr val="ABC0E4">
-                  <a:alpha val="30196"/>
-                </a:srgbClr>
-              </a:gs>
-              <a:gs pos="100000">
-                <a:srgbClr val="C7D5ED">
-                  <a:alpha val="0"/>
-                </a:srgbClr>
-              </a:gs>
-            </a:gsLst>
-            <a:lin ang="5400000" scaled="1"/>
-          </a:gradFill>
-          <a:ln/>
-          <a:effectLst>
-            <a:softEdge rad="25400"/>
-          </a:effectLst>
-        </p:spPr>
-        <p:txBody>
-          <a:bodyPr/>
-          <a:lstStyle/>
-          <a:p>
-            <a:endParaRPr lang="en-GB"/>
-          </a:p>
-        </p:txBody>
-      </p:sp>
-      <p:sp>
-        <p:nvSpPr>
-          <p:cNvPr id="58" name="slant stripe 5">
-            <a:extLst>
-              <a:ext uri="{FF2B5EF4-FFF2-40B4-BE49-F238E27FC236}">
-                <a16:creationId xmlns:a16="http://schemas.microsoft.com/office/drawing/2014/main" id="{EFC69DBB-3D17-E2EC-D148-BF55E6AD423B}"/>
-              </a:ext>
-              <a:ext uri="{C183D7F6-B498-43B3-948B-1728B52AA6E4}">
-                <adec:decorative xmlns:adec="http://schemas.microsoft.com/office/drawing/2017/decorative" val="1"/>
-              </a:ext>
-            </a:extLst>
-          </p:cNvPr>
-          <p:cNvSpPr/>
-          <p:nvPr/>
-        </p:nvSpPr>
-        <p:spPr>
-          <a:xfrm rot="20160000">
-            <a:off x="1597942" y="-1089102"/>
-            <a:ext cx="116067" cy="3108960"/>
-          </a:xfrm>
-          <a:prstGeom prst="rect">
-            <a:avLst/>
-          </a:prstGeom>
-          <a:gradFill>
-            <a:gsLst>
-              <a:gs pos="0">
-                <a:schemeClr val="accent1">
-                  <a:lumMod val="5000"/>
-                  <a:lumOff val="95000"/>
-                </a:schemeClr>
-              </a:gs>
-              <a:gs pos="31000">
-                <a:srgbClr val="ABC0E4">
-                  <a:alpha val="30196"/>
-                </a:srgbClr>
-              </a:gs>
-              <a:gs pos="100000">
-                <a:srgbClr val="C7D5ED">
-                  <a:alpha val="0"/>
-                </a:srgbClr>
-              </a:gs>
-            </a:gsLst>
-            <a:lin ang="5400000" scaled="1"/>
-          </a:gradFill>
-          <a:ln/>
-          <a:effectLst>
-            <a:softEdge rad="25400"/>
-          </a:effectLst>
-        </p:spPr>
-        <p:txBody>
-          <a:bodyPr/>
-          <a:lstStyle/>
-          <a:p>
-            <a:endParaRPr lang="en-GB"/>
-          </a:p>
-        </p:txBody>
-      </p:sp>
-      <p:sp>
-        <p:nvSpPr>
-          <p:cNvPr id="60" name="slant stripe 6">
-            <a:extLst>
-              <a:ext uri="{FF2B5EF4-FFF2-40B4-BE49-F238E27FC236}">
-                <a16:creationId xmlns:a16="http://schemas.microsoft.com/office/drawing/2014/main" id="{56C09C52-BD04-D56F-8B93-9829729AEBAE}"/>
-              </a:ext>
-              <a:ext uri="{C183D7F6-B498-43B3-948B-1728B52AA6E4}">
-                <adec:decorative xmlns:adec="http://schemas.microsoft.com/office/drawing/2017/decorative" val="1"/>
-              </a:ext>
-            </a:extLst>
-          </p:cNvPr>
-          <p:cNvSpPr/>
-          <p:nvPr/>
-        </p:nvSpPr>
-        <p:spPr>
-          <a:xfrm rot="20160000">
-            <a:off x="2087389" y="-1089101"/>
-            <a:ext cx="116067" cy="3108960"/>
-          </a:xfrm>
-          <a:prstGeom prst="rect">
-            <a:avLst/>
-          </a:prstGeom>
-          <a:gradFill>
-            <a:gsLst>
-              <a:gs pos="0">
-                <a:schemeClr val="accent1">
-                  <a:lumMod val="5000"/>
-                  <a:lumOff val="95000"/>
-                </a:schemeClr>
-              </a:gs>
-              <a:gs pos="31000">
-                <a:srgbClr val="ABC0E4">
-                  <a:alpha val="30196"/>
-                </a:srgbClr>
-              </a:gs>
-              <a:gs pos="100000">
-                <a:srgbClr val="C7D5ED">
-                  <a:alpha val="0"/>
-                </a:srgbClr>
-              </a:gs>
-            </a:gsLst>
-            <a:lin ang="5400000" scaled="1"/>
-          </a:gradFill>
-          <a:ln/>
-          <a:effectLst>
-            <a:softEdge rad="25400"/>
-          </a:effectLst>
-        </p:spPr>
-        <p:txBody>
-          <a:bodyPr/>
-          <a:lstStyle/>
-          <a:p>
-            <a:endParaRPr lang="en-GB"/>
-          </a:p>
-        </p:txBody>
-      </p:sp>
-      <p:sp>
-        <p:nvSpPr>
-          <p:cNvPr id="62" name="slant stripe 7">
-            <a:extLst>
-              <a:ext uri="{FF2B5EF4-FFF2-40B4-BE49-F238E27FC236}">
-                <a16:creationId xmlns:a16="http://schemas.microsoft.com/office/drawing/2014/main" id="{471D9A79-D678-F6A9-BD0C-8EB95EC3F68F}"/>
-              </a:ext>
-              <a:ext uri="{C183D7F6-B498-43B3-948B-1728B52AA6E4}">
-                <adec:decorative xmlns:adec="http://schemas.microsoft.com/office/drawing/2017/decorative" val="1"/>
-              </a:ext>
-            </a:extLst>
-          </p:cNvPr>
-          <p:cNvSpPr/>
-          <p:nvPr/>
-        </p:nvSpPr>
-        <p:spPr>
-          <a:xfrm rot="20160000">
-            <a:off x="2423547" y="-1089101"/>
-            <a:ext cx="116067" cy="3108960"/>
-          </a:xfrm>
-          <a:prstGeom prst="rect">
-            <a:avLst/>
-          </a:prstGeom>
-          <a:gradFill>
-            <a:gsLst>
-              <a:gs pos="0">
-                <a:schemeClr val="accent1">
-                  <a:lumMod val="5000"/>
-                  <a:lumOff val="95000"/>
-                </a:schemeClr>
-              </a:gs>
-              <a:gs pos="31000">
-                <a:srgbClr val="ABC0E4">
-                  <a:alpha val="30196"/>
-                </a:srgbClr>
-              </a:gs>
-              <a:gs pos="100000">
-                <a:srgbClr val="C7D5ED">
-                  <a:alpha val="0"/>
-                </a:srgbClr>
-              </a:gs>
-            </a:gsLst>
-            <a:lin ang="5400000" scaled="1"/>
-          </a:gradFill>
-          <a:ln/>
-          <a:effectLst>
-            <a:softEdge rad="25400"/>
-          </a:effectLst>
-        </p:spPr>
-        <p:txBody>
-          <a:bodyPr/>
-          <a:lstStyle/>
-          <a:p>
-            <a:endParaRPr lang="en-GB"/>
-          </a:p>
-        </p:txBody>
-      </p:sp>
-      <p:sp>
-        <p:nvSpPr>
-          <p:cNvPr id="64" name="slant stripe 8">
-            <a:extLst>
-              <a:ext uri="{FF2B5EF4-FFF2-40B4-BE49-F238E27FC236}">
-                <a16:creationId xmlns:a16="http://schemas.microsoft.com/office/drawing/2014/main" id="{0FEAA283-98A0-C658-156F-64F103917C6F}"/>
-              </a:ext>
-              <a:ext uri="{C183D7F6-B498-43B3-948B-1728B52AA6E4}">
-                <adec:decorative xmlns:adec="http://schemas.microsoft.com/office/drawing/2017/decorative" val="1"/>
-              </a:ext>
-            </a:extLst>
-          </p:cNvPr>
-          <p:cNvSpPr/>
-          <p:nvPr/>
-        </p:nvSpPr>
-        <p:spPr>
-          <a:xfrm rot="20160000">
-            <a:off x="2799631" y="-1063702"/>
-            <a:ext cx="116067" cy="3108960"/>
-          </a:xfrm>
-          <a:prstGeom prst="rect">
-            <a:avLst/>
-          </a:prstGeom>
-          <a:gradFill>
-            <a:gsLst>
-              <a:gs pos="0">
-                <a:schemeClr val="accent1">
-                  <a:lumMod val="5000"/>
-                  <a:lumOff val="95000"/>
-                </a:schemeClr>
-              </a:gs>
-              <a:gs pos="31000">
-                <a:srgbClr val="ABC0E4">
-                  <a:alpha val="30196"/>
-                </a:srgbClr>
-              </a:gs>
-              <a:gs pos="100000">
-                <a:srgbClr val="C7D5ED">
-                  <a:alpha val="0"/>
-                </a:srgbClr>
-              </a:gs>
-            </a:gsLst>
-            <a:lin ang="5400000" scaled="1"/>
-          </a:gradFill>
-          <a:ln/>
-          <a:effectLst>
-            <a:softEdge rad="25400"/>
-          </a:effectLst>
-        </p:spPr>
-        <p:txBody>
-          <a:bodyPr/>
-          <a:lstStyle/>
-          <a:p>
-            <a:endParaRPr lang="en-GB"/>
-          </a:p>
-        </p:txBody>
-      </p:sp>
-      <p:sp>
-        <p:nvSpPr>
-          <p:cNvPr id="66" name="slant stripe 9">
-            <a:extLst>
-              <a:ext uri="{FF2B5EF4-FFF2-40B4-BE49-F238E27FC236}">
-                <a16:creationId xmlns:a16="http://schemas.microsoft.com/office/drawing/2014/main" id="{82C76830-68DE-E477-C319-7EA37FE4AA31}"/>
-              </a:ext>
-              <a:ext uri="{C183D7F6-B498-43B3-948B-1728B52AA6E4}">
-                <adec:decorative xmlns:adec="http://schemas.microsoft.com/office/drawing/2017/decorative" val="1"/>
-              </a:ext>
-            </a:extLst>
-          </p:cNvPr>
-          <p:cNvSpPr/>
-          <p:nvPr/>
-        </p:nvSpPr>
-        <p:spPr>
-          <a:xfrm rot="20160000">
-            <a:off x="3334089" y="-1089103"/>
-            <a:ext cx="116067" cy="3108960"/>
-          </a:xfrm>
-          <a:prstGeom prst="rect">
-            <a:avLst/>
-          </a:prstGeom>
-          <a:gradFill>
-            <a:gsLst>
-              <a:gs pos="0">
-                <a:schemeClr val="accent1">
-                  <a:lumMod val="5000"/>
-                  <a:lumOff val="95000"/>
-                </a:schemeClr>
-              </a:gs>
-              <a:gs pos="31000">
-                <a:srgbClr val="ABC0E4">
-                  <a:alpha val="30196"/>
-                </a:srgbClr>
-              </a:gs>
-              <a:gs pos="100000">
-                <a:srgbClr val="C7D5ED">
-                  <a:alpha val="0"/>
-                </a:srgbClr>
-              </a:gs>
-            </a:gsLst>
-            <a:lin ang="5400000" scaled="1"/>
-          </a:gradFill>
-          <a:ln/>
-          <a:effectLst>
-            <a:softEdge rad="25400"/>
-          </a:effectLst>
-        </p:spPr>
-        <p:txBody>
-          <a:bodyPr/>
-          <a:lstStyle/>
-          <a:p>
-            <a:endParaRPr lang="en-GB"/>
-          </a:p>
-        </p:txBody>
-      </p:sp>
-      <p:sp>
-        <p:nvSpPr>
-          <p:cNvPr id="3" name="slant stripe 1">
-            <a:extLst>
-              <a:ext uri="{C183D7F6-B498-43B3-948B-1728B52AA6E4}">
-                <adec:decorative xmlns:adec="http://schemas.microsoft.com/office/drawing/2017/decorative" val="1"/>
-              </a:ext>
-            </a:extLst>
-          </p:cNvPr>
-          <p:cNvSpPr/>
-          <p:nvPr/>
-        </p:nvSpPr>
-        <p:spPr>
-          <a:xfrm rot="-1440000">
-            <a:off x="-265623" y="-670274"/>
-            <a:ext cx="303917" cy="3108960"/>
-          </a:xfrm>
-          <a:prstGeom prst="rect">
-            <a:avLst/>
-          </a:prstGeom>
-          <a:gradFill>
-            <a:gsLst>
-              <a:gs pos="0">
-                <a:schemeClr val="accent1">
-                  <a:lumMod val="5000"/>
-                  <a:lumOff val="95000"/>
-                </a:schemeClr>
-              </a:gs>
-              <a:gs pos="31000">
-                <a:srgbClr val="ABC0E4">
-                  <a:alpha val="30196"/>
-                </a:srgbClr>
-              </a:gs>
-              <a:gs pos="100000">
-                <a:srgbClr val="C7D5ED">
-                  <a:alpha val="0"/>
-                </a:srgbClr>
-              </a:gs>
-            </a:gsLst>
-            <a:lin ang="5400000" scaled="1"/>
-          </a:gradFill>
-          <a:ln/>
-          <a:effectLst>
-            <a:softEdge rad="25400"/>
-          </a:effectLst>
-        </p:spPr>
-        <p:txBody>
-          <a:bodyPr/>
-          <a:lstStyle/>
-          <a:p>
-            <a:endParaRPr lang="en-GB"/>
-          </a:p>
-        </p:txBody>
-      </p:sp>
-      <p:sp>
-        <p:nvSpPr>
-          <p:cNvPr id="4" name="slant stripe 2">
-            <a:extLst>
-              <a:ext uri="{C183D7F6-B498-43B3-948B-1728B52AA6E4}">
-                <adec:decorative xmlns:adec="http://schemas.microsoft.com/office/drawing/2017/decorative" val="1"/>
-              </a:ext>
-            </a:extLst>
-          </p:cNvPr>
-          <p:cNvSpPr/>
-          <p:nvPr/>
-        </p:nvSpPr>
-        <p:spPr>
-          <a:xfrm rot="-1440000">
-            <a:off x="155001" y="-670274"/>
-            <a:ext cx="303917" cy="3108960"/>
-          </a:xfrm>
-          <a:prstGeom prst="rect">
-            <a:avLst/>
-          </a:prstGeom>
-          <a:gradFill>
-            <a:gsLst>
-              <a:gs pos="0">
-                <a:schemeClr val="accent1">
-                  <a:lumMod val="5000"/>
-                  <a:lumOff val="95000"/>
-                </a:schemeClr>
-              </a:gs>
-              <a:gs pos="31000">
-                <a:srgbClr val="ABC0E4">
-                  <a:alpha val="30196"/>
-                </a:srgbClr>
-              </a:gs>
-              <a:gs pos="100000">
-                <a:srgbClr val="C7D5ED">
-                  <a:alpha val="0"/>
-                </a:srgbClr>
-              </a:gs>
-            </a:gsLst>
-            <a:lin ang="5400000" scaled="1"/>
-          </a:gradFill>
-          <a:ln/>
-          <a:effectLst>
-            <a:softEdge rad="25400"/>
-          </a:effectLst>
-        </p:spPr>
-        <p:txBody>
-          <a:bodyPr/>
-          <a:lstStyle/>
-          <a:p>
-            <a:endParaRPr lang="en-GB"/>
-          </a:p>
-        </p:txBody>
-      </p:sp>
-      <p:sp>
-        <p:nvSpPr>
-          <p:cNvPr id="5" name="slant stripe 3">
-            <a:extLst>
-              <a:ext uri="{C183D7F6-B498-43B3-948B-1728B52AA6E4}">
-                <adec:decorative xmlns:adec="http://schemas.microsoft.com/office/drawing/2017/decorative" val="1"/>
-              </a:ext>
-            </a:extLst>
-          </p:cNvPr>
-          <p:cNvSpPr/>
-          <p:nvPr/>
-        </p:nvSpPr>
-        <p:spPr>
-          <a:xfrm rot="-1440000">
-            <a:off x="575625" y="-670274"/>
-            <a:ext cx="303917" cy="3108960"/>
-          </a:xfrm>
-          <a:prstGeom prst="rect">
-            <a:avLst/>
-          </a:prstGeom>
-          <a:gradFill>
-            <a:gsLst>
-              <a:gs pos="0">
-                <a:schemeClr val="accent1">
-                  <a:lumMod val="5000"/>
-                  <a:lumOff val="95000"/>
-                </a:schemeClr>
-              </a:gs>
-              <a:gs pos="31000">
-                <a:srgbClr val="ABC0E4">
-                  <a:alpha val="30196"/>
-                </a:srgbClr>
-              </a:gs>
-              <a:gs pos="100000">
-                <a:srgbClr val="C7D5ED">
-                  <a:alpha val="0"/>
-                </a:srgbClr>
-              </a:gs>
-            </a:gsLst>
-            <a:lin ang="5400000" scaled="1"/>
-          </a:gradFill>
-          <a:ln/>
-          <a:effectLst>
-            <a:softEdge rad="25400"/>
-          </a:effectLst>
-        </p:spPr>
-        <p:txBody>
-          <a:bodyPr/>
-          <a:lstStyle/>
-          <a:p>
-            <a:endParaRPr lang="en-GB"/>
-          </a:p>
-        </p:txBody>
-      </p:sp>
-      <p:sp>
-        <p:nvSpPr>
-          <p:cNvPr id="6" name="slant stripe 4">
-            <a:extLst>
-              <a:ext uri="{C183D7F6-B498-43B3-948B-1728B52AA6E4}">
-                <adec:decorative xmlns:adec="http://schemas.microsoft.com/office/drawing/2017/decorative" val="1"/>
-              </a:ext>
-            </a:extLst>
-          </p:cNvPr>
-          <p:cNvSpPr/>
-          <p:nvPr/>
-        </p:nvSpPr>
-        <p:spPr>
-          <a:xfrm rot="-1440000">
-            <a:off x="996249" y="-670274"/>
-            <a:ext cx="303917" cy="3108960"/>
-          </a:xfrm>
-          <a:prstGeom prst="rect">
-            <a:avLst/>
-          </a:prstGeom>
-          <a:gradFill>
-            <a:gsLst>
-              <a:gs pos="0">
-                <a:schemeClr val="accent1">
-                  <a:lumMod val="5000"/>
-                  <a:lumOff val="95000"/>
-                </a:schemeClr>
-              </a:gs>
-              <a:gs pos="31000">
-                <a:srgbClr val="ABC0E4">
-                  <a:alpha val="30196"/>
-                </a:srgbClr>
-              </a:gs>
-              <a:gs pos="100000">
-                <a:srgbClr val="C7D5ED">
-                  <a:alpha val="0"/>
-                </a:srgbClr>
-              </a:gs>
-            </a:gsLst>
-            <a:lin ang="5400000" scaled="1"/>
-          </a:gradFill>
-          <a:ln/>
-          <a:effectLst>
-            <a:softEdge rad="25400"/>
-          </a:effectLst>
-        </p:spPr>
-        <p:txBody>
-          <a:bodyPr/>
-          <a:lstStyle/>
-          <a:p>
-            <a:endParaRPr lang="en-GB"/>
-          </a:p>
-        </p:txBody>
-      </p:sp>
-      <p:sp>
-        <p:nvSpPr>
-          <p:cNvPr id="7" name="slant stripe 5">
-            <a:extLst>
-              <a:ext uri="{C183D7F6-B498-43B3-948B-1728B52AA6E4}">
-                <adec:decorative xmlns:adec="http://schemas.microsoft.com/office/drawing/2017/decorative" val="1"/>
-              </a:ext>
-            </a:extLst>
-          </p:cNvPr>
-          <p:cNvSpPr/>
-          <p:nvPr/>
-        </p:nvSpPr>
-        <p:spPr>
-          <a:xfrm rot="-1440000">
-            <a:off x="1416873" y="-670274"/>
-            <a:ext cx="303917" cy="3108960"/>
-          </a:xfrm>
-          <a:prstGeom prst="rect">
-            <a:avLst/>
-          </a:prstGeom>
-          <a:gradFill>
-            <a:gsLst>
-              <a:gs pos="0">
-                <a:schemeClr val="accent1">
-                  <a:lumMod val="5000"/>
-                  <a:lumOff val="95000"/>
-                </a:schemeClr>
-              </a:gs>
-              <a:gs pos="31000">
-                <a:srgbClr val="ABC0E4">
-                  <a:alpha val="30196"/>
-                </a:srgbClr>
-              </a:gs>
-              <a:gs pos="100000">
-                <a:srgbClr val="C7D5ED">
-                  <a:alpha val="0"/>
-                </a:srgbClr>
-              </a:gs>
-            </a:gsLst>
-            <a:lin ang="5400000" scaled="1"/>
-          </a:gradFill>
-          <a:ln/>
-          <a:effectLst>
-            <a:softEdge rad="25400"/>
-          </a:effectLst>
-        </p:spPr>
-        <p:txBody>
-          <a:bodyPr/>
-          <a:lstStyle/>
-          <a:p>
-            <a:endParaRPr lang="en-GB"/>
-          </a:p>
-        </p:txBody>
-      </p:sp>
-      <p:sp>
-        <p:nvSpPr>
-          <p:cNvPr id="8" name="slant stripe 6">
-            <a:extLst>
-              <a:ext uri="{C183D7F6-B498-43B3-948B-1728B52AA6E4}">
-                <adec:decorative xmlns:adec="http://schemas.microsoft.com/office/drawing/2017/decorative" val="1"/>
-              </a:ext>
-            </a:extLst>
-          </p:cNvPr>
-          <p:cNvSpPr/>
-          <p:nvPr/>
-        </p:nvSpPr>
-        <p:spPr>
-          <a:xfrm rot="-1440000">
-            <a:off x="1837497" y="-670274"/>
-            <a:ext cx="303917" cy="3108960"/>
-          </a:xfrm>
-          <a:prstGeom prst="rect">
-            <a:avLst/>
-          </a:prstGeom>
-          <a:gradFill>
-            <a:gsLst>
-              <a:gs pos="0">
-                <a:schemeClr val="accent1">
-                  <a:lumMod val="5000"/>
-                  <a:lumOff val="95000"/>
-                </a:schemeClr>
-              </a:gs>
-              <a:gs pos="31000">
-                <a:srgbClr val="ABC0E4">
-                  <a:alpha val="30196"/>
-                </a:srgbClr>
-              </a:gs>
-              <a:gs pos="100000">
-                <a:srgbClr val="C7D5ED">
-                  <a:alpha val="0"/>
-                </a:srgbClr>
-              </a:gs>
-            </a:gsLst>
-            <a:lin ang="5400000" scaled="1"/>
-          </a:gradFill>
-          <a:ln/>
-          <a:effectLst>
-            <a:softEdge rad="25400"/>
-          </a:effectLst>
-        </p:spPr>
-        <p:txBody>
-          <a:bodyPr/>
-          <a:lstStyle/>
-          <a:p>
-            <a:endParaRPr lang="en-GB"/>
-          </a:p>
-        </p:txBody>
-      </p:sp>
-      <p:sp>
-        <p:nvSpPr>
-          <p:cNvPr id="9" name="slant stripe 7">
-            <a:extLst>
-              <a:ext uri="{C183D7F6-B498-43B3-948B-1728B52AA6E4}">
-                <adec:decorative xmlns:adec="http://schemas.microsoft.com/office/drawing/2017/decorative" val="1"/>
-              </a:ext>
-            </a:extLst>
-          </p:cNvPr>
-          <p:cNvSpPr/>
-          <p:nvPr/>
-        </p:nvSpPr>
-        <p:spPr>
-          <a:xfrm rot="-1440000">
-            <a:off x="2258121" y="-670274"/>
-            <a:ext cx="303917" cy="3108960"/>
-          </a:xfrm>
-          <a:prstGeom prst="rect">
-            <a:avLst/>
-          </a:prstGeom>
-          <a:gradFill>
-            <a:gsLst>
-              <a:gs pos="0">
-                <a:schemeClr val="accent1">
-                  <a:lumMod val="5000"/>
-                  <a:lumOff val="95000"/>
-                </a:schemeClr>
-              </a:gs>
-              <a:gs pos="31000">
-                <a:srgbClr val="ABC0E4">
-                  <a:alpha val="30196"/>
-                </a:srgbClr>
-              </a:gs>
-              <a:gs pos="100000">
-                <a:srgbClr val="C7D5ED">
-                  <a:alpha val="0"/>
-                </a:srgbClr>
-              </a:gs>
-            </a:gsLst>
-            <a:lin ang="5400000" scaled="1"/>
-          </a:gradFill>
-          <a:ln/>
-          <a:effectLst>
-            <a:softEdge rad="25400"/>
-          </a:effectLst>
-        </p:spPr>
-        <p:txBody>
-          <a:bodyPr/>
-          <a:lstStyle/>
-          <a:p>
-            <a:endParaRPr lang="en-GB"/>
-          </a:p>
-        </p:txBody>
-      </p:sp>
-      <p:sp>
-        <p:nvSpPr>
-          <p:cNvPr id="10" name="slant stripe 8">
-            <a:extLst>
-              <a:ext uri="{C183D7F6-B498-43B3-948B-1728B52AA6E4}">
-                <adec:decorative xmlns:adec="http://schemas.microsoft.com/office/drawing/2017/decorative" val="1"/>
-              </a:ext>
-            </a:extLst>
-          </p:cNvPr>
-          <p:cNvSpPr/>
-          <p:nvPr/>
-        </p:nvSpPr>
-        <p:spPr>
-          <a:xfrm rot="-1440000">
-            <a:off x="2678745" y="-670274"/>
-            <a:ext cx="303917" cy="3108960"/>
-          </a:xfrm>
-          <a:prstGeom prst="rect">
-            <a:avLst/>
-          </a:prstGeom>
-          <a:gradFill>
-            <a:gsLst>
-              <a:gs pos="0">
-                <a:schemeClr val="accent1">
-                  <a:lumMod val="5000"/>
-                  <a:lumOff val="95000"/>
-                </a:schemeClr>
-              </a:gs>
-              <a:gs pos="31000">
-                <a:srgbClr val="ABC0E4">
-                  <a:alpha val="30196"/>
-                </a:srgbClr>
-              </a:gs>
-              <a:gs pos="100000">
-                <a:srgbClr val="C7D5ED">
-                  <a:alpha val="0"/>
-                </a:srgbClr>
-              </a:gs>
-            </a:gsLst>
-            <a:lin ang="5400000" scaled="1"/>
-          </a:gradFill>
-          <a:ln/>
-          <a:effectLst>
-            <a:softEdge rad="25400"/>
-          </a:effectLst>
-        </p:spPr>
-        <p:txBody>
-          <a:bodyPr/>
-          <a:lstStyle/>
-          <a:p>
-            <a:endParaRPr lang="en-GB"/>
-          </a:p>
-        </p:txBody>
-      </p:sp>
-      <p:sp>
-        <p:nvSpPr>
-          <p:cNvPr id="11" name="slant stripe 9">
-            <a:extLst>
-              <a:ext uri="{C183D7F6-B498-43B3-948B-1728B52AA6E4}">
-                <adec:decorative xmlns:adec="http://schemas.microsoft.com/office/drawing/2017/decorative" val="1"/>
-              </a:ext>
-            </a:extLst>
-          </p:cNvPr>
-          <p:cNvSpPr/>
-          <p:nvPr/>
-        </p:nvSpPr>
-        <p:spPr>
-          <a:xfrm rot="-1440000">
-            <a:off x="3099369" y="-670274"/>
-            <a:ext cx="303917" cy="3108960"/>
-          </a:xfrm>
-          <a:prstGeom prst="rect">
-            <a:avLst/>
-          </a:prstGeom>
-          <a:gradFill>
-            <a:gsLst>
-              <a:gs pos="0">
-                <a:schemeClr val="accent1">
-                  <a:lumMod val="5000"/>
-                  <a:lumOff val="95000"/>
-                </a:schemeClr>
-              </a:gs>
-              <a:gs pos="31000">
-                <a:srgbClr val="ABC0E4">
-                  <a:alpha val="30196"/>
-                </a:srgbClr>
-              </a:gs>
-              <a:gs pos="100000">
-                <a:srgbClr val="C7D5ED">
-                  <a:alpha val="0"/>
-                </a:srgbClr>
-              </a:gs>
-            </a:gsLst>
-            <a:lin ang="5400000" scaled="1"/>
-          </a:gradFill>
-          <a:ln/>
-          <a:effectLst>
-            <a:softEdge rad="25400"/>
-          </a:effectLst>
-        </p:spPr>
-        <p:txBody>
-          <a:bodyPr/>
-          <a:lstStyle/>
-          <a:p>
-            <a:endParaRPr lang="en-GB"/>
-          </a:p>
-        </p:txBody>
-      </p:sp>
       <p:pic>
         <p:nvPicPr>
           <p:cNvPr id="13" name="Image 0" descr="Side profile of a teal car"/>
@@ -2011,14 +3562,12 @@
         </p:nvPicPr>
         <p:blipFill>
           <a:blip r:embed="rId5"/>
-          <a:stretch>
-            <a:fillRect/>
-          </a:stretch>
+          <a:stretch/>
         </p:blipFill>
         <p:spPr>
           <a:xfrm>
-            <a:off x="197" y="144954"/>
-            <a:ext cx="3200400" cy="1487686"/>
+            <a:off x="4811" y="763068"/>
+            <a:ext cx="13840145" cy="6437277"/>
           </a:xfrm>
           <a:prstGeom prst="rect">
             <a:avLst/>
@@ -2039,8 +3588,8 @@
         </p:nvSpPr>
         <p:spPr>
           <a:xfrm>
-            <a:off x="1481328" y="0"/>
-            <a:ext cx="1719072" cy="1828800"/>
+            <a:off x="5921829" y="0"/>
+            <a:ext cx="7927185" cy="7920038"/>
           </a:xfrm>
           <a:prstGeom prst="rect">
             <a:avLst/>
@@ -2066,7 +3615,7 @@
           <a:bodyPr/>
           <a:lstStyle/>
           <a:p>
-            <a:endParaRPr lang="en-GB"/>
+            <a:endParaRPr lang="en-GB" sz="27593"/>
           </a:p>
         </p:txBody>
       </p:sp>
@@ -2084,8 +3633,8 @@
         </p:nvSpPr>
         <p:spPr>
           <a:xfrm>
-            <a:off x="1463040" y="0"/>
-            <a:ext cx="36576" cy="1828800"/>
+            <a:off x="5812967" y="0"/>
+            <a:ext cx="174123" cy="7920038"/>
           </a:xfrm>
           <a:prstGeom prst="rect">
             <a:avLst/>
@@ -2099,7 +3648,7 @@
           <a:bodyPr/>
           <a:lstStyle/>
           <a:p>
-            <a:endParaRPr lang="en-GB"/>
+            <a:endParaRPr lang="en-GB" sz="27593"/>
           </a:p>
         </p:txBody>
       </p:sp>
@@ -2110,13 +3659,13 @@
             <a:spLocks noGrp="1"/>
           </p:cNvSpPr>
           <p:nvPr>
-            <p:ph type="title" idx="100" hasCustomPrompt="1"/>
+            <p:ph type="title" idx="100"/>
           </p:nvPr>
         </p:nvSpPr>
         <p:spPr>
           <a:xfrm>
-            <a:off x="1636776" y="180848"/>
-            <a:ext cx="1435608" cy="457200"/>
+            <a:off x="6767692" y="1038873"/>
+            <a:ext cx="6834359" cy="1980010"/>
           </a:xfrm>
           <a:prstGeom prst="rect">
             <a:avLst/>
@@ -2128,11 +3677,9 @@
           <a:bodyPr wrap="square" lIns="0" tIns="0" rIns="0" bIns="0" rtlCol="0" anchor="ctr"/>
           <a:lstStyle/>
           <a:p>
-            <a:pPr marL="0" indent="0" algn="l">
-              <a:buNone/>
-            </a:pPr>
-            <a:r>
-              <a:rPr lang="en-US" sz="1600" b="1" dirty="0">
+            <a:pPr algn="l"/>
+            <a:r>
+              <a:rPr lang="en-US" sz="6119" b="1" dirty="0">
                 <a:solidFill>
                   <a:schemeClr val="accent1">
                     <a:lumMod val="50000"/>
@@ -2144,7 +3691,7 @@
               </a:rPr>
               <a:t>Morgan Lowe</a:t>
             </a:r>
-            <a:endParaRPr lang="en-US" sz="1600" dirty="0">
+            <a:endParaRPr lang="en-US" sz="6119" dirty="0">
               <a:solidFill>
                 <a:schemeClr val="accent1">
                   <a:lumMod val="50000"/>
@@ -2169,8 +3716,8 @@
         </p:nvSpPr>
         <p:spPr>
           <a:xfrm>
-            <a:off x="1636776" y="729361"/>
-            <a:ext cx="457200" cy="29261"/>
+            <a:off x="6767693" y="3244949"/>
+            <a:ext cx="2176548" cy="126722"/>
           </a:xfrm>
           <a:prstGeom prst="rect">
             <a:avLst/>
@@ -2184,7 +3731,7 @@
           <a:bodyPr/>
           <a:lstStyle/>
           <a:p>
-            <a:endParaRPr lang="en-GB"/>
+            <a:endParaRPr lang="en-GB" sz="27593"/>
           </a:p>
         </p:txBody>
       </p:sp>
@@ -2202,8 +3749,8 @@
         </p:nvSpPr>
         <p:spPr>
           <a:xfrm>
-            <a:off x="1636776" y="847090"/>
-            <a:ext cx="1435608" cy="502920"/>
+            <a:off x="6767692" y="3575277"/>
+            <a:ext cx="6834359" cy="2178011"/>
           </a:xfrm>
           <a:prstGeom prst="rect">
             <a:avLst/>
@@ -2215,14 +3762,13 @@
           <a:bodyPr wrap="square" lIns="0" tIns="0" rIns="0" bIns="0" rtlCol="0" anchor="t"/>
           <a:lstStyle/>
           <a:p>
-            <a:pPr marL="0" indent="0" algn="l">
+            <a:pPr>
               <a:spcAft>
-                <a:spcPts val="400"/>
+                <a:spcPts val="1530"/>
               </a:spcAft>
-              <a:buNone/>
             </a:pPr>
             <a:r>
-              <a:rPr lang="en-US" sz="850" b="1" dirty="0">
+              <a:rPr lang="en-US" sz="3251" b="1" dirty="0">
                 <a:solidFill>
                   <a:schemeClr val="accent1">
                     <a:lumMod val="50000"/>
@@ -2234,7 +3780,7 @@
               </a:rPr>
               <a:t>morganwtlowe@gmail.com</a:t>
             </a:r>
-            <a:endParaRPr lang="en-US" sz="850" b="1" dirty="0">
+            <a:endParaRPr lang="en-US" sz="3251" b="1" dirty="0">
               <a:solidFill>
                 <a:schemeClr val="accent1">
                   <a:lumMod val="50000"/>
@@ -2244,14 +3790,13 @@
             </a:endParaRPr>
           </a:p>
           <a:p>
-            <a:pPr marL="0" indent="0" algn="l">
+            <a:pPr>
               <a:spcAft>
-                <a:spcPts val="400"/>
+                <a:spcPts val="1530"/>
               </a:spcAft>
-              <a:buNone/>
             </a:pPr>
             <a:r>
-              <a:rPr lang="en-US" sz="850" b="1" dirty="0">
+              <a:rPr lang="en-US" sz="3251" b="1" dirty="0">
                 <a:solidFill>
                   <a:srgbClr val="002060"/>
                 </a:solidFill>
@@ -2261,7 +3806,7 @@
               </a:rPr>
               <a:t>+44 7982 939186</a:t>
             </a:r>
-            <a:endParaRPr lang="en-US" sz="850" b="1" dirty="0">
+            <a:endParaRPr lang="en-US" sz="3251" b="1" dirty="0">
               <a:solidFill>
                 <a:srgbClr val="002060"/>
               </a:solidFill>
@@ -2292,8 +3837,8 @@
         </p:blipFill>
         <p:spPr>
           <a:xfrm>
-            <a:off x="2669659" y="1295782"/>
-            <a:ext cx="510185" cy="513126"/>
+            <a:off x="10972800" y="4853656"/>
+            <a:ext cx="2827473" cy="3020332"/>
           </a:xfrm>
           <a:prstGeom prst="rect">
             <a:avLst/>
@@ -2309,9 +3854,9 @@
 </file>
 
 <file path=ppt/theme/theme1.xml><?xml version="1.0" encoding="utf-8"?>
-<a:theme xmlns:a="http://schemas.openxmlformats.org/drawingml/2006/main" name="Office Theme">
+<a:theme xmlns:a="http://schemas.openxmlformats.org/drawingml/2006/main" name="Office 2013 - 2022 Theme">
   <a:themeElements>
-    <a:clrScheme name="Office">
+    <a:clrScheme name="Office 2013 - 2022 Theme">
       <a:dk1>
         <a:sysClr val="windowText" lastClr="000000"/>
       </a:dk1>
@@ -2349,7 +3894,7 @@
         <a:srgbClr val="954F72"/>
       </a:folHlink>
     </a:clrScheme>
-    <a:fontScheme name="Office">
+    <a:fontScheme name="Office 2013 - 2022 Theme">
       <a:majorFont>
         <a:latin typeface="Calibri Light" panose="020F0302020204030204"/>
         <a:ea typeface=""/>
@@ -2384,23 +3929,6 @@
         <a:font script="Viet" typeface="Times New Roman"/>
         <a:font script="Uigh" typeface="Microsoft Uighur"/>
         <a:font script="Geor" typeface="Sylfaen"/>
-        <a:font script="Armn" typeface="Arial"/>
-        <a:font script="Bugi" typeface="Leelawadee UI"/>
-        <a:font script="Bopo" typeface="Microsoft JhengHei"/>
-        <a:font script="Java" typeface="Javanese Text"/>
-        <a:font script="Lisu" typeface="Segoe UI"/>
-        <a:font script="Mymr" typeface="Myanmar Text"/>
-        <a:font script="Nkoo" typeface="Ebrima"/>
-        <a:font script="Olck" typeface="Nirmala UI"/>
-        <a:font script="Osma" typeface="Ebrima"/>
-        <a:font script="Phag" typeface="Phagspa"/>
-        <a:font script="Syrn" typeface="Estrangelo Edessa"/>
-        <a:font script="Syrj" typeface="Estrangelo Edessa"/>
-        <a:font script="Syre" typeface="Estrangelo Edessa"/>
-        <a:font script="Sora" typeface="Nirmala UI"/>
-        <a:font script="Tale" typeface="Microsoft Tai Le"/>
-        <a:font script="Talu" typeface="Microsoft New Tai Lue"/>
-        <a:font script="Tfng" typeface="Ebrima"/>
       </a:majorFont>
       <a:minorFont>
         <a:latin typeface="Calibri" panose="020F0502020204030204"/>
@@ -2436,26 +3964,9 @@
         <a:font script="Viet" typeface="Arial"/>
         <a:font script="Uigh" typeface="Microsoft Uighur"/>
         <a:font script="Geor" typeface="Sylfaen"/>
-        <a:font script="Armn" typeface="Arial"/>
-        <a:font script="Bugi" typeface="Leelawadee UI"/>
-        <a:font script="Bopo" typeface="Microsoft JhengHei"/>
-        <a:font script="Java" typeface="Javanese Text"/>
-        <a:font script="Lisu" typeface="Segoe UI"/>
-        <a:font script="Mymr" typeface="Myanmar Text"/>
-        <a:font script="Nkoo" typeface="Ebrima"/>
-        <a:font script="Olck" typeface="Nirmala UI"/>
-        <a:font script="Osma" typeface="Ebrima"/>
-        <a:font script="Phag" typeface="Phagspa"/>
-        <a:font script="Syrn" typeface="Estrangelo Edessa"/>
-        <a:font script="Syrj" typeface="Estrangelo Edessa"/>
-        <a:font script="Syre" typeface="Estrangelo Edessa"/>
-        <a:font script="Sora" typeface="Nirmala UI"/>
-        <a:font script="Tale" typeface="Microsoft Tai Le"/>
-        <a:font script="Talu" typeface="Microsoft New Tai Lue"/>
-        <a:font script="Tfng" typeface="Ebrima"/>
       </a:minorFont>
     </a:fontScheme>
-    <a:fmtScheme name="Office">
+    <a:fmtScheme name="Office 2013 - 2022 Theme">
       <a:fillStyleLst>
         <a:solidFill>
           <a:schemeClr val="phClr"/>
@@ -2597,7 +4108,7 @@
   <a:extraClrSchemeLst/>
   <a:extLst>
     <a:ext uri="{05A4C25C-085E-4340-85A3-A5531E510DB2}">
-      <thm15:themeFamily xmlns:thm15="http://schemas.microsoft.com/office/thememl/2012/main" name="Office Theme" id="{62F939B6-93AF-4DB8-9C6B-D6C7DFDC589F}" vid="{4A3C46E8-61CC-4603-A589-7422A47A8E4A}"/>
+      <thm15:themeFamily xmlns:thm15="http://schemas.microsoft.com/office/thememl/2012/main" name="Office 2013 - 2022 Theme" id="{62F939B6-93AF-4DB8-9C6B-D6C7DFDC589F}" vid="{4A3C46E8-61CC-4603-A589-7422A47A8E4A}"/>
     </a:ext>
   </a:extLst>
 </a:theme>
